--- a/docs/urbanisation_prospects_presentation.pptx
+++ b/docs/urbanisation_prospects_presentation.pptx
@@ -131,6 +131,7 @@
 <p1510:revInfo xmlns:a="http://schemas.openxmlformats.org/drawingml/2006/main" xmlns:r="http://schemas.openxmlformats.org/officeDocument/2006/relationships" xmlns:p1510="http://schemas.microsoft.com/office/powerpoint/2015/10/main">
   <p1510:revLst>
     <p1510:client id="{16771182-0255-46FD-A267-F79F9FC18F6F}" v="4" dt="2026-03-01T09:09:49.479"/>
+    <p1510:client id="{7680F8FA-E828-82D0-F2DB-7DE3CC2A828A}" v="7" dt="2026-03-02T18:51:07.076"/>
   </p1510:revLst>
 </p1510:revInfo>
 </file>
@@ -941,8 +942,48 @@
             <ac:spMk id="18" creationId="{D4FB5E47-B71E-2FE9-9B44-E8220F4D70F7}"/>
           </ac:spMkLst>
         </pc:spChg>
-        <pc:picChg chg="mod">
-          <ac:chgData name="Jonathan Hayward" userId="b50b5895-66ae-4161-9610-d0d8f25118a4" providerId="ADAL" clId="{72FF0399-27F1-49DB-9E36-447A45B81DB4}" dt="2026-02-28T16:17:51.210" v="2"/>
+      </pc:sldChg>
+    </pc:docChg>
+  </pc:docChgLst>
+  <pc:docChgLst>
+    <pc:chgData name="Jonathan Hayward" userId="S::jonathan.hayward@ninetyone.com::b50b5895-66ae-4161-9610-d0d8f25118a4" providerId="AD" clId="Web-{7680F8FA-E828-82D0-F2DB-7DE3CC2A828A}"/>
+    <pc:docChg chg="modSld">
+      <pc:chgData name="Jonathan Hayward" userId="S::jonathan.hayward@ninetyone.com::b50b5895-66ae-4161-9610-d0d8f25118a4" providerId="AD" clId="Web-{7680F8FA-E828-82D0-F2DB-7DE3CC2A828A}" dt="2026-03-02T18:51:07.076" v="5" actId="1076"/>
+      <pc:docMkLst>
+        <pc:docMk/>
+      </pc:docMkLst>
+      <pc:sldChg chg="addSp delSp modSp">
+        <pc:chgData name="Jonathan Hayward" userId="S::jonathan.hayward@ninetyone.com::b50b5895-66ae-4161-9610-d0d8f25118a4" providerId="AD" clId="Web-{7680F8FA-E828-82D0-F2DB-7DE3CC2A828A}" dt="2026-03-02T18:51:07.076" v="5" actId="1076"/>
+        <pc:sldMkLst>
+          <pc:docMk/>
+          <pc:sldMk cId="663972408" sldId="265"/>
+        </pc:sldMkLst>
+        <pc:spChg chg="del">
+          <ac:chgData name="Jonathan Hayward" userId="S::jonathan.hayward@ninetyone.com::b50b5895-66ae-4161-9610-d0d8f25118a4" providerId="AD" clId="Web-{7680F8FA-E828-82D0-F2DB-7DE3CC2A828A}" dt="2026-03-02T18:50:54.326" v="4"/>
+          <ac:spMkLst>
+            <pc:docMk/>
+            <pc:sldMk cId="663972408" sldId="265"/>
+            <ac:spMk id="3" creationId="{DCDE7B3F-3142-7DBE-036A-95A50D72349B}"/>
+          </ac:spMkLst>
+        </pc:spChg>
+        <pc:spChg chg="mod">
+          <ac:chgData name="Jonathan Hayward" userId="S::jonathan.hayward@ninetyone.com::b50b5895-66ae-4161-9610-d0d8f25118a4" providerId="AD" clId="Web-{7680F8FA-E828-82D0-F2DB-7DE3CC2A828A}" dt="2026-03-02T18:51:07.076" v="5" actId="1076"/>
+          <ac:spMkLst>
+            <pc:docMk/>
+            <pc:sldMk cId="663972408" sldId="265"/>
+            <ac:spMk id="5" creationId="{B043618C-CAAF-A616-C8B6-744944726FA2}"/>
+          </ac:spMkLst>
+        </pc:spChg>
+        <pc:picChg chg="add mod">
+          <ac:chgData name="Jonathan Hayward" userId="S::jonathan.hayward@ninetyone.com::b50b5895-66ae-4161-9610-d0d8f25118a4" providerId="AD" clId="Web-{7680F8FA-E828-82D0-F2DB-7DE3CC2A828A}" dt="2026-03-02T18:50:50.279" v="3"/>
+          <ac:picMkLst>
+            <pc:docMk/>
+            <pc:sldMk cId="663972408" sldId="265"/>
+            <ac:picMk id="4" creationId="{43747789-D68F-A930-4098-3FD10610C175}"/>
+          </ac:picMkLst>
+        </pc:picChg>
+        <pc:picChg chg="del">
+          <ac:chgData name="Jonathan Hayward" userId="S::jonathan.hayward@ninetyone.com::b50b5895-66ae-4161-9610-d0d8f25118a4" providerId="AD" clId="Web-{7680F8FA-E828-82D0-F2DB-7DE3CC2A828A}" dt="2026-03-02T18:49:51.654" v="0"/>
           <ac:picMkLst>
             <pc:docMk/>
             <pc:sldMk cId="663972408" sldId="265"/>
@@ -1124,7 +1165,7 @@
           <a:bodyPr/>
           <a:lstStyle/>
           <a:p>
-            <a:endParaRPr lang="en-US" dirty="0"/>
+            <a:endParaRPr lang="en-US"/>
           </a:p>
         </p:txBody>
       </p:sp>
@@ -1208,7 +1249,7 @@
           <a:bodyPr/>
           <a:lstStyle/>
           <a:p>
-            <a:endParaRPr lang="en-US" dirty="0"/>
+            <a:endParaRPr lang="en-US"/>
           </a:p>
         </p:txBody>
       </p:sp>
@@ -1292,7 +1333,7 @@
           <a:bodyPr/>
           <a:lstStyle/>
           <a:p>
-            <a:endParaRPr lang="en-US" dirty="0"/>
+            <a:endParaRPr lang="en-US"/>
           </a:p>
         </p:txBody>
       </p:sp>
@@ -1376,7 +1417,7 @@
           <a:bodyPr/>
           <a:lstStyle/>
           <a:p>
-            <a:endParaRPr lang="en-US" dirty="0"/>
+            <a:endParaRPr lang="en-US"/>
           </a:p>
         </p:txBody>
       </p:sp>
@@ -1478,7 +1519,7 @@
           <a:bodyPr/>
           <a:lstStyle/>
           <a:p>
-            <a:endParaRPr lang="en-US" dirty="0"/>
+            <a:endParaRPr lang="en-US"/>
           </a:p>
         </p:txBody>
       </p:sp>
@@ -1568,7 +1609,7 @@
           <a:bodyPr/>
           <a:lstStyle/>
           <a:p>
-            <a:endParaRPr lang="en-US" dirty="0"/>
+            <a:endParaRPr lang="en-US"/>
           </a:p>
         </p:txBody>
       </p:sp>
@@ -1652,7 +1693,7 @@
           <a:bodyPr/>
           <a:lstStyle/>
           <a:p>
-            <a:endParaRPr lang="en-US" dirty="0"/>
+            <a:endParaRPr lang="en-US"/>
           </a:p>
         </p:txBody>
       </p:sp>
@@ -1736,7 +1777,7 @@
           <a:bodyPr/>
           <a:lstStyle/>
           <a:p>
-            <a:endParaRPr lang="en-US" dirty="0"/>
+            <a:endParaRPr lang="en-US"/>
           </a:p>
         </p:txBody>
       </p:sp>
@@ -1820,7 +1861,7 @@
           <a:bodyPr/>
           <a:lstStyle/>
           <a:p>
-            <a:endParaRPr lang="en-US" dirty="0"/>
+            <a:endParaRPr lang="en-US"/>
           </a:p>
         </p:txBody>
       </p:sp>
@@ -1904,7 +1945,7 @@
           <a:bodyPr/>
           <a:lstStyle/>
           <a:p>
-            <a:endParaRPr lang="en-US" dirty="0"/>
+            <a:endParaRPr lang="en-US"/>
           </a:p>
         </p:txBody>
       </p:sp>
@@ -1989,7 +2030,6 @@
               <a:rPr lang="en-US"/>
               <a:t>Click to edit Master title style</a:t>
             </a:r>
-            <a:endParaRPr lang="en-US" dirty="0"/>
           </a:p>
         </p:txBody>
       </p:sp>
@@ -2054,7 +2094,6 @@
               <a:rPr lang="en-US"/>
               <a:t>Click to edit Master subtitle style</a:t>
             </a:r>
-            <a:endParaRPr lang="en-US" dirty="0"/>
           </a:p>
         </p:txBody>
       </p:sp>
@@ -2075,9 +2114,9 @@
           <a:p>
             <a:fld id="{C764DE79-268F-4C1A-8933-263129D2AF90}" type="datetimeFigureOut">
               <a:rPr lang="en-US" dirty="0"/>
-              <a:t>3/1/2026</a:t>
+              <a:t>3/2/2026</a:t>
             </a:fld>
-            <a:endParaRPr lang="en-US" dirty="0"/>
+            <a:endParaRPr lang="en-US"/>
           </a:p>
         </p:txBody>
       </p:sp>
@@ -2096,7 +2135,7 @@
           <a:bodyPr/>
           <a:lstStyle/>
           <a:p>
-            <a:endParaRPr lang="en-US" dirty="0"/>
+            <a:endParaRPr lang="en-US"/>
           </a:p>
         </p:txBody>
       </p:sp>
@@ -2119,7 +2158,7 @@
               <a:rPr lang="en-US" dirty="0"/>
               <a:t>‹#›</a:t>
             </a:fld>
-            <a:endParaRPr lang="en-US" dirty="0"/>
+            <a:endParaRPr lang="en-US"/>
           </a:p>
         </p:txBody>
       </p:sp>
@@ -2173,7 +2212,6 @@
               <a:rPr lang="en-US"/>
               <a:t>Click to edit Master title style</a:t>
             </a:r>
-            <a:endParaRPr lang="en-US" dirty="0"/>
           </a:p>
         </p:txBody>
       </p:sp>
@@ -2225,7 +2263,6 @@
               <a:rPr lang="en-US"/>
               <a:t>Fifth level</a:t>
             </a:r>
-            <a:endParaRPr lang="en-US" dirty="0"/>
           </a:p>
         </p:txBody>
       </p:sp>
@@ -2246,9 +2283,9 @@
           <a:p>
             <a:fld id="{C764DE79-268F-4C1A-8933-263129D2AF90}" type="datetimeFigureOut">
               <a:rPr lang="en-US" dirty="0"/>
-              <a:t>3/1/2026</a:t>
+              <a:t>3/2/2026</a:t>
             </a:fld>
-            <a:endParaRPr lang="en-US" dirty="0"/>
+            <a:endParaRPr lang="en-US"/>
           </a:p>
         </p:txBody>
       </p:sp>
@@ -2267,7 +2304,7 @@
           <a:bodyPr/>
           <a:lstStyle/>
           <a:p>
-            <a:endParaRPr lang="en-US" dirty="0"/>
+            <a:endParaRPr lang="en-US"/>
           </a:p>
         </p:txBody>
       </p:sp>
@@ -2290,7 +2327,7 @@
               <a:rPr lang="en-US" dirty="0"/>
               <a:t>‹#›</a:t>
             </a:fld>
-            <a:endParaRPr lang="en-US" dirty="0"/>
+            <a:endParaRPr lang="en-US"/>
           </a:p>
         </p:txBody>
       </p:sp>
@@ -2349,7 +2386,6 @@
               <a:rPr lang="en-US"/>
               <a:t>Click to edit Master title style</a:t>
             </a:r>
-            <a:endParaRPr lang="en-US" dirty="0"/>
           </a:p>
         </p:txBody>
       </p:sp>
@@ -2406,7 +2442,6 @@
               <a:rPr lang="en-US"/>
               <a:t>Fifth level</a:t>
             </a:r>
-            <a:endParaRPr lang="en-US" dirty="0"/>
           </a:p>
         </p:txBody>
       </p:sp>
@@ -2427,9 +2462,9 @@
           <a:p>
             <a:fld id="{C764DE79-268F-4C1A-8933-263129D2AF90}" type="datetimeFigureOut">
               <a:rPr lang="en-US" dirty="0"/>
-              <a:t>3/1/2026</a:t>
+              <a:t>3/2/2026</a:t>
             </a:fld>
-            <a:endParaRPr lang="en-US" dirty="0"/>
+            <a:endParaRPr lang="en-US"/>
           </a:p>
         </p:txBody>
       </p:sp>
@@ -2448,7 +2483,7 @@
           <a:bodyPr/>
           <a:lstStyle/>
           <a:p>
-            <a:endParaRPr lang="en-US" dirty="0"/>
+            <a:endParaRPr lang="en-US"/>
           </a:p>
         </p:txBody>
       </p:sp>
@@ -2471,7 +2506,7 @@
               <a:rPr lang="en-US" dirty="0"/>
               <a:t>‹#›</a:t>
             </a:fld>
-            <a:endParaRPr lang="en-US" dirty="0"/>
+            <a:endParaRPr lang="en-US"/>
           </a:p>
         </p:txBody>
       </p:sp>
@@ -2560,7 +2595,6 @@
               <a:rPr lang="en-US"/>
               <a:t>Click to edit Master title style</a:t>
             </a:r>
-            <a:endParaRPr lang="en-US" dirty="0"/>
           </a:p>
         </p:txBody>
       </p:sp>
@@ -2612,7 +2646,6 @@
               <a:rPr lang="en-US"/>
               <a:t>Fifth level</a:t>
             </a:r>
-            <a:endParaRPr lang="en-US" dirty="0"/>
           </a:p>
         </p:txBody>
       </p:sp>
@@ -2633,9 +2666,9 @@
           <a:p>
             <a:fld id="{C764DE79-268F-4C1A-8933-263129D2AF90}" type="datetimeFigureOut">
               <a:rPr lang="en-US" dirty="0"/>
-              <a:t>3/1/2026</a:t>
+              <a:t>3/2/2026</a:t>
             </a:fld>
-            <a:endParaRPr lang="en-US" dirty="0"/>
+            <a:endParaRPr lang="en-US"/>
           </a:p>
         </p:txBody>
       </p:sp>
@@ -2654,7 +2687,7 @@
           <a:bodyPr/>
           <a:lstStyle/>
           <a:p>
-            <a:endParaRPr lang="en-US" dirty="0"/>
+            <a:endParaRPr lang="en-US"/>
           </a:p>
         </p:txBody>
       </p:sp>
@@ -2677,7 +2710,7 @@
               <a:rPr lang="en-US" dirty="0"/>
               <a:t>‹#›</a:t>
             </a:fld>
-            <a:endParaRPr lang="en-US" dirty="0"/>
+            <a:endParaRPr lang="en-US"/>
           </a:p>
         </p:txBody>
       </p:sp>
@@ -2740,7 +2773,6 @@
               <a:rPr lang="en-US"/>
               <a:t>Click to edit Master title style</a:t>
             </a:r>
-            <a:endParaRPr lang="en-US" dirty="0"/>
           </a:p>
         </p:txBody>
       </p:sp>
@@ -2878,9 +2910,9 @@
           <a:p>
             <a:fld id="{C764DE79-268F-4C1A-8933-263129D2AF90}" type="datetimeFigureOut">
               <a:rPr lang="en-US" dirty="0"/>
-              <a:t>3/1/2026</a:t>
+              <a:t>3/2/2026</a:t>
             </a:fld>
-            <a:endParaRPr lang="en-US" dirty="0"/>
+            <a:endParaRPr lang="en-US"/>
           </a:p>
         </p:txBody>
       </p:sp>
@@ -2899,7 +2931,7 @@
           <a:bodyPr/>
           <a:lstStyle/>
           <a:p>
-            <a:endParaRPr lang="en-US" dirty="0"/>
+            <a:endParaRPr lang="en-US"/>
           </a:p>
         </p:txBody>
       </p:sp>
@@ -2922,7 +2954,7 @@
               <a:rPr lang="en-US" dirty="0"/>
               <a:t>‹#›</a:t>
             </a:fld>
-            <a:endParaRPr lang="en-US" dirty="0"/>
+            <a:endParaRPr lang="en-US"/>
           </a:p>
         </p:txBody>
       </p:sp>
@@ -2976,7 +3008,6 @@
               <a:rPr lang="en-US"/>
               <a:t>Click to edit Master title style</a:t>
             </a:r>
-            <a:endParaRPr lang="en-US" dirty="0"/>
           </a:p>
         </p:txBody>
       </p:sp>
@@ -3033,7 +3064,6 @@
               <a:rPr lang="en-US"/>
               <a:t>Fifth level</a:t>
             </a:r>
-            <a:endParaRPr lang="en-US" dirty="0"/>
           </a:p>
         </p:txBody>
       </p:sp>
@@ -3090,7 +3120,6 @@
               <a:rPr lang="en-US"/>
               <a:t>Fifth level</a:t>
             </a:r>
-            <a:endParaRPr lang="en-US" dirty="0"/>
           </a:p>
         </p:txBody>
       </p:sp>
@@ -3111,9 +3140,9 @@
           <a:p>
             <a:fld id="{C764DE79-268F-4C1A-8933-263129D2AF90}" type="datetimeFigureOut">
               <a:rPr lang="en-US" dirty="0"/>
-              <a:t>3/1/2026</a:t>
+              <a:t>3/2/2026</a:t>
             </a:fld>
-            <a:endParaRPr lang="en-US" dirty="0"/>
+            <a:endParaRPr lang="en-US"/>
           </a:p>
         </p:txBody>
       </p:sp>
@@ -3132,7 +3161,7 @@
           <a:bodyPr/>
           <a:lstStyle/>
           <a:p>
-            <a:endParaRPr lang="en-US" dirty="0"/>
+            <a:endParaRPr lang="en-US"/>
           </a:p>
         </p:txBody>
       </p:sp>
@@ -3155,7 +3184,7 @@
               <a:rPr lang="en-US" dirty="0"/>
               <a:t>‹#›</a:t>
             </a:fld>
-            <a:endParaRPr lang="en-US" dirty="0"/>
+            <a:endParaRPr lang="en-US"/>
           </a:p>
         </p:txBody>
       </p:sp>
@@ -3214,7 +3243,6 @@
               <a:rPr lang="en-US"/>
               <a:t>Click to edit Master title style</a:t>
             </a:r>
-            <a:endParaRPr lang="en-US" dirty="0"/>
           </a:p>
         </p:txBody>
       </p:sp>
@@ -3336,7 +3364,6 @@
               <a:rPr lang="en-US"/>
               <a:t>Fifth level</a:t>
             </a:r>
-            <a:endParaRPr lang="en-US" dirty="0"/>
           </a:p>
         </p:txBody>
       </p:sp>
@@ -3458,7 +3485,6 @@
               <a:rPr lang="en-US"/>
               <a:t>Fifth level</a:t>
             </a:r>
-            <a:endParaRPr lang="en-US" dirty="0"/>
           </a:p>
         </p:txBody>
       </p:sp>
@@ -3479,9 +3505,9 @@
           <a:p>
             <a:fld id="{C764DE79-268F-4C1A-8933-263129D2AF90}" type="datetimeFigureOut">
               <a:rPr lang="en-US" dirty="0"/>
-              <a:t>3/1/2026</a:t>
+              <a:t>3/2/2026</a:t>
             </a:fld>
-            <a:endParaRPr lang="en-US" dirty="0"/>
+            <a:endParaRPr lang="en-US"/>
           </a:p>
         </p:txBody>
       </p:sp>
@@ -3500,7 +3526,7 @@
           <a:bodyPr/>
           <a:lstStyle/>
           <a:p>
-            <a:endParaRPr lang="en-US" dirty="0"/>
+            <a:endParaRPr lang="en-US"/>
           </a:p>
         </p:txBody>
       </p:sp>
@@ -3523,7 +3549,7 @@
               <a:rPr lang="en-US" dirty="0"/>
               <a:t>‹#›</a:t>
             </a:fld>
-            <a:endParaRPr lang="en-US" dirty="0"/>
+            <a:endParaRPr lang="en-US"/>
           </a:p>
         </p:txBody>
       </p:sp>
@@ -3577,7 +3603,6 @@
               <a:rPr lang="en-US"/>
               <a:t>Click to edit Master title style</a:t>
             </a:r>
-            <a:endParaRPr lang="en-US" dirty="0"/>
           </a:p>
         </p:txBody>
       </p:sp>
@@ -3598,9 +3623,9 @@
           <a:p>
             <a:fld id="{C764DE79-268F-4C1A-8933-263129D2AF90}" type="datetimeFigureOut">
               <a:rPr lang="en-US" dirty="0"/>
-              <a:t>3/1/2026</a:t>
+              <a:t>3/2/2026</a:t>
             </a:fld>
-            <a:endParaRPr lang="en-US" dirty="0"/>
+            <a:endParaRPr lang="en-US"/>
           </a:p>
         </p:txBody>
       </p:sp>
@@ -3619,7 +3644,7 @@
           <a:bodyPr/>
           <a:lstStyle/>
           <a:p>
-            <a:endParaRPr lang="en-US" dirty="0"/>
+            <a:endParaRPr lang="en-US"/>
           </a:p>
         </p:txBody>
       </p:sp>
@@ -3642,7 +3667,7 @@
               <a:rPr lang="en-US" dirty="0"/>
               <a:t>‹#›</a:t>
             </a:fld>
-            <a:endParaRPr lang="en-US" dirty="0"/>
+            <a:endParaRPr lang="en-US"/>
           </a:p>
         </p:txBody>
       </p:sp>
@@ -3694,9 +3719,9 @@
           <a:p>
             <a:fld id="{C764DE79-268F-4C1A-8933-263129D2AF90}" type="datetimeFigureOut">
               <a:rPr lang="en-US" dirty="0"/>
-              <a:t>3/1/2026</a:t>
+              <a:t>3/2/2026</a:t>
             </a:fld>
-            <a:endParaRPr lang="en-US" dirty="0"/>
+            <a:endParaRPr lang="en-US"/>
           </a:p>
         </p:txBody>
       </p:sp>
@@ -3715,7 +3740,7 @@
           <a:bodyPr/>
           <a:lstStyle/>
           <a:p>
-            <a:endParaRPr lang="en-US" dirty="0"/>
+            <a:endParaRPr lang="en-US"/>
           </a:p>
         </p:txBody>
       </p:sp>
@@ -3738,7 +3763,7 @@
               <a:rPr lang="en-US" dirty="0"/>
               <a:t>‹#›</a:t>
             </a:fld>
-            <a:endParaRPr lang="en-US" dirty="0"/>
+            <a:endParaRPr lang="en-US"/>
           </a:p>
         </p:txBody>
       </p:sp>
@@ -3801,7 +3826,6 @@
               <a:rPr lang="en-US"/>
               <a:t>Click to edit Master title style</a:t>
             </a:r>
-            <a:endParaRPr lang="en-US" dirty="0"/>
           </a:p>
         </p:txBody>
       </p:sp>
@@ -3886,7 +3910,6 @@
               <a:rPr lang="en-US"/>
               <a:t>Fifth level</a:t>
             </a:r>
-            <a:endParaRPr lang="en-US" dirty="0"/>
           </a:p>
         </p:txBody>
       </p:sp>
@@ -3972,9 +3995,9 @@
           <a:p>
             <a:fld id="{C764DE79-268F-4C1A-8933-263129D2AF90}" type="datetimeFigureOut">
               <a:rPr lang="en-US" dirty="0"/>
-              <a:t>3/1/2026</a:t>
+              <a:t>3/2/2026</a:t>
             </a:fld>
-            <a:endParaRPr lang="en-US" dirty="0"/>
+            <a:endParaRPr lang="en-US"/>
           </a:p>
         </p:txBody>
       </p:sp>
@@ -3993,7 +4016,7 @@
           <a:bodyPr/>
           <a:lstStyle/>
           <a:p>
-            <a:endParaRPr lang="en-US" dirty="0"/>
+            <a:endParaRPr lang="en-US"/>
           </a:p>
         </p:txBody>
       </p:sp>
@@ -4016,7 +4039,7 @@
               <a:rPr lang="en-US" dirty="0"/>
               <a:t>‹#›</a:t>
             </a:fld>
-            <a:endParaRPr lang="en-US" dirty="0"/>
+            <a:endParaRPr lang="en-US"/>
           </a:p>
         </p:txBody>
       </p:sp>
@@ -4079,7 +4102,6 @@
               <a:rPr lang="en-US"/>
               <a:t>Click to edit Master title style</a:t>
             </a:r>
-            <a:endParaRPr lang="en-US" dirty="0"/>
           </a:p>
         </p:txBody>
       </p:sp>
@@ -4144,7 +4166,6 @@
               <a:rPr lang="en-US"/>
               <a:t>Click icon to add picture</a:t>
             </a:r>
-            <a:endParaRPr lang="en-US" dirty="0"/>
           </a:p>
         </p:txBody>
       </p:sp>
@@ -4230,9 +4251,9 @@
           <a:p>
             <a:fld id="{C764DE79-268F-4C1A-8933-263129D2AF90}" type="datetimeFigureOut">
               <a:rPr lang="en-US" dirty="0"/>
-              <a:t>3/1/2026</a:t>
+              <a:t>3/2/2026</a:t>
             </a:fld>
-            <a:endParaRPr lang="en-US" dirty="0"/>
+            <a:endParaRPr lang="en-US"/>
           </a:p>
         </p:txBody>
       </p:sp>
@@ -4251,7 +4272,7 @@
           <a:bodyPr/>
           <a:lstStyle/>
           <a:p>
-            <a:endParaRPr lang="en-US" dirty="0"/>
+            <a:endParaRPr lang="en-US"/>
           </a:p>
         </p:txBody>
       </p:sp>
@@ -4274,7 +4295,7 @@
               <a:rPr lang="en-US" dirty="0"/>
               <a:t>‹#›</a:t>
             </a:fld>
-            <a:endParaRPr lang="en-US" dirty="0"/>
+            <a:endParaRPr lang="en-US"/>
           </a:p>
         </p:txBody>
       </p:sp>
@@ -4343,7 +4364,6 @@
               <a:rPr lang="en-US"/>
               <a:t>Click to edit Master title style</a:t>
             </a:r>
-            <a:endParaRPr lang="en-US" dirty="0"/>
           </a:p>
         </p:txBody>
       </p:sp>
@@ -4405,7 +4425,6 @@
               <a:rPr lang="en-US"/>
               <a:t>Fifth level</a:t>
             </a:r>
-            <a:endParaRPr lang="en-US" dirty="0"/>
           </a:p>
         </p:txBody>
       </p:sp>
@@ -4444,9 +4463,9 @@
           <a:p>
             <a:fld id="{C764DE79-268F-4C1A-8933-263129D2AF90}" type="datetimeFigureOut">
               <a:rPr lang="en-US" dirty="0"/>
-              <a:t>3/1/2026</a:t>
+              <a:t>3/2/2026</a:t>
             </a:fld>
-            <a:endParaRPr lang="en-US" dirty="0"/>
+            <a:endParaRPr lang="en-US"/>
           </a:p>
         </p:txBody>
       </p:sp>
@@ -4483,7 +4502,7 @@
             </a:lvl1pPr>
           </a:lstStyle>
           <a:p>
-            <a:endParaRPr lang="en-US" dirty="0"/>
+            <a:endParaRPr lang="en-US"/>
           </a:p>
         </p:txBody>
       </p:sp>
@@ -4524,7 +4543,7 @@
               <a:rPr lang="en-US" dirty="0"/>
               <a:t>‹#›</a:t>
             </a:fld>
-            <a:endParaRPr lang="en-US" dirty="0"/>
+            <a:endParaRPr lang="en-US"/>
           </a:p>
         </p:txBody>
       </p:sp>
@@ -4985,7 +5004,7 @@
           <a:lstStyle/>
           <a:p>
             <a:r>
-              <a:rPr lang="en-US" sz="825" b="1" kern="0" spc="300" dirty="0">
+              <a:rPr lang="en-US" sz="825" b="1" kern="0" spc="300">
                 <a:solidFill>
                   <a:srgbClr val="0D9488"/>
                 </a:solidFill>
@@ -4995,7 +5014,7 @@
               </a:rPr>
               <a:t>DATA ENGINEERING ASSESSMENT</a:t>
             </a:r>
-            <a:endParaRPr lang="en-US" sz="825" dirty="0"/>
+            <a:endParaRPr lang="en-US" sz="825"/>
           </a:p>
         </p:txBody>
       </p:sp>
@@ -5021,7 +5040,7 @@
           <a:lstStyle/>
           <a:p>
             <a:r>
-              <a:rPr lang="en-US" sz="3900" b="1" dirty="0">
+              <a:rPr lang="en-US" sz="3900" b="1">
                 <a:solidFill>
                   <a:srgbClr val="FFFFFF"/>
                 </a:solidFill>
@@ -5031,7 +5050,7 @@
               </a:rPr>
               <a:t>Urbanisation Prospects</a:t>
             </a:r>
-            <a:endParaRPr lang="en-US" sz="3900" dirty="0"/>
+            <a:endParaRPr lang="en-US" sz="3900"/>
           </a:p>
         </p:txBody>
       </p:sp>
@@ -5057,7 +5076,7 @@
           <a:lstStyle/>
           <a:p>
             <a:r>
-              <a:rPr lang="en-US" sz="1650" dirty="0">
+              <a:rPr lang="en-US" sz="1650">
                 <a:solidFill>
                   <a:srgbClr val="94A3B8"/>
                 </a:solidFill>
@@ -5067,7 +5086,7 @@
               </a:rPr>
               <a:t>Global Market Opportunity Analysis</a:t>
             </a:r>
-            <a:endParaRPr lang="en-US" sz="1650" dirty="0"/>
+            <a:endParaRPr lang="en-US" sz="1650"/>
           </a:p>
         </p:txBody>
       </p:sp>
@@ -5125,7 +5144,7 @@
           <a:lstStyle/>
           <a:p>
             <a:r>
-              <a:rPr lang="en-US" sz="1950" b="1" dirty="0">
+              <a:rPr lang="en-US" sz="1950" b="1">
                 <a:solidFill>
                   <a:srgbClr val="F59E0B"/>
                 </a:solidFill>
@@ -5135,7 +5154,7 @@
               </a:rPr>
               <a:t>235</a:t>
             </a:r>
-            <a:endParaRPr lang="en-US" sz="1950" dirty="0"/>
+            <a:endParaRPr lang="en-US" sz="1950"/>
           </a:p>
         </p:txBody>
       </p:sp>
@@ -5161,7 +5180,7 @@
           <a:lstStyle/>
           <a:p>
             <a:r>
-              <a:rPr lang="en-US" sz="750" dirty="0">
+              <a:rPr lang="en-US" sz="750">
                 <a:solidFill>
                   <a:srgbClr val="94A3B8"/>
                 </a:solidFill>
@@ -5171,7 +5190,7 @@
               </a:rPr>
               <a:t>Countries Analysed</a:t>
             </a:r>
-            <a:endParaRPr lang="en-US" sz="750" dirty="0"/>
+            <a:endParaRPr lang="en-US" sz="750"/>
           </a:p>
         </p:txBody>
       </p:sp>
@@ -5197,7 +5216,7 @@
           <a:lstStyle/>
           <a:p>
             <a:r>
-              <a:rPr lang="en-US" sz="1950" b="1" dirty="0">
+              <a:rPr lang="en-US" sz="1950" b="1">
                 <a:solidFill>
                   <a:srgbClr val="F59E0B"/>
                 </a:solidFill>
@@ -5207,7 +5226,7 @@
               </a:rPr>
               <a:t>1950–2050</a:t>
             </a:r>
-            <a:endParaRPr lang="en-US" sz="1950" dirty="0"/>
+            <a:endParaRPr lang="en-US" sz="1950"/>
           </a:p>
         </p:txBody>
       </p:sp>
@@ -5233,7 +5252,7 @@
           <a:lstStyle/>
           <a:p>
             <a:r>
-              <a:rPr lang="en-US" sz="750" dirty="0">
+              <a:rPr lang="en-US" sz="750">
                 <a:solidFill>
                   <a:srgbClr val="94A3B8"/>
                 </a:solidFill>
@@ -5243,7 +5262,7 @@
               </a:rPr>
               <a:t>Data Range</a:t>
             </a:r>
-            <a:endParaRPr lang="en-US" sz="750" dirty="0"/>
+            <a:endParaRPr lang="en-US" sz="750"/>
           </a:p>
         </p:txBody>
       </p:sp>
@@ -5269,7 +5288,7 @@
           <a:lstStyle/>
           <a:p>
             <a:r>
-              <a:rPr lang="en-US" sz="1950" b="1" dirty="0">
+              <a:rPr lang="en-US" sz="1950" b="1">
                 <a:solidFill>
                   <a:srgbClr val="F59E0B"/>
                 </a:solidFill>
@@ -5279,7 +5298,7 @@
               </a:rPr>
               <a:t>4</a:t>
             </a:r>
-            <a:endParaRPr lang="en-US" sz="1950" dirty="0"/>
+            <a:endParaRPr lang="en-US" sz="1950"/>
           </a:p>
         </p:txBody>
       </p:sp>
@@ -5305,7 +5324,7 @@
           <a:lstStyle/>
           <a:p>
             <a:r>
-              <a:rPr lang="en-US" sz="750" dirty="0">
+              <a:rPr lang="en-US" sz="750">
                 <a:solidFill>
                   <a:srgbClr val="94A3B8"/>
                 </a:solidFill>
@@ -5315,7 +5334,7 @@
               </a:rPr>
               <a:t>Data Sources</a:t>
             </a:r>
-            <a:endParaRPr lang="en-US" sz="750" dirty="0"/>
+            <a:endParaRPr lang="en-US" sz="750"/>
           </a:p>
         </p:txBody>
       </p:sp>
@@ -5341,7 +5360,7 @@
           <a:lstStyle/>
           <a:p>
             <a:r>
-              <a:rPr lang="en-US" sz="1950" b="1" dirty="0">
+              <a:rPr lang="en-US" sz="1950" b="1">
                 <a:solidFill>
                   <a:srgbClr val="F59E0B"/>
                 </a:solidFill>
@@ -5351,7 +5370,7 @@
               </a:rPr>
               <a:t>32</a:t>
             </a:r>
-            <a:endParaRPr lang="en-US" sz="1950" dirty="0"/>
+            <a:endParaRPr lang="en-US" sz="1950"/>
           </a:p>
         </p:txBody>
       </p:sp>
@@ -5377,7 +5396,7 @@
           <a:lstStyle/>
           <a:p>
             <a:r>
-              <a:rPr lang="en-US" sz="750" dirty="0">
+              <a:rPr lang="en-US" sz="750">
                 <a:solidFill>
                   <a:srgbClr val="94A3B8"/>
                 </a:solidFill>
@@ -5387,7 +5406,7 @@
               </a:rPr>
               <a:t>High Opportunity Markets</a:t>
             </a:r>
-            <a:endParaRPr lang="en-US" sz="750" dirty="0"/>
+            <a:endParaRPr lang="en-US" sz="750"/>
           </a:p>
         </p:txBody>
       </p:sp>
@@ -5446,7 +5465,7 @@
           <a:p>
             <a:pPr algn="ctr"/>
             <a:r>
-              <a:rPr lang="en-US" sz="750" dirty="0">
+              <a:rPr lang="en-US" sz="750">
                 <a:solidFill>
                   <a:srgbClr val="94A3B8"/>
                 </a:solidFill>
@@ -5456,7 +5475,7 @@
               </a:rPr>
               <a:t>Microsoft Fabric  •  PowerBI  •  Delta Lake  •  Medallion Architecture</a:t>
             </a:r>
-            <a:endParaRPr lang="en-US" sz="750" dirty="0"/>
+            <a:endParaRPr lang="en-US" sz="750"/>
           </a:p>
         </p:txBody>
       </p:sp>
@@ -5620,7 +5639,7 @@
           <a:p>
             <a:pPr algn="ctr"/>
             <a:r>
-              <a:rPr lang="en-US" sz="4200" b="1" dirty="0">
+              <a:rPr lang="en-US" sz="4200" b="1">
                 <a:solidFill>
                   <a:srgbClr val="FFFFFF"/>
                 </a:solidFill>
@@ -5630,7 +5649,7 @@
               </a:rPr>
               <a:t>Thank You</a:t>
             </a:r>
-            <a:endParaRPr lang="en-US" sz="4200" dirty="0"/>
+            <a:endParaRPr lang="en-US" sz="4200"/>
           </a:p>
         </p:txBody>
       </p:sp>
@@ -5689,7 +5708,7 @@
           <a:p>
             <a:pPr algn="ctr"/>
             <a:r>
-              <a:rPr lang="en-US" sz="2100" b="1" dirty="0">
+              <a:rPr lang="en-US" sz="2100" b="1">
                 <a:solidFill>
                   <a:srgbClr val="F59E0B"/>
                 </a:solidFill>
@@ -5699,7 +5718,7 @@
               </a:rPr>
               <a:t>235</a:t>
             </a:r>
-            <a:endParaRPr lang="en-US" sz="2100" dirty="0"/>
+            <a:endParaRPr lang="en-US" sz="2100"/>
           </a:p>
         </p:txBody>
       </p:sp>
@@ -5726,7 +5745,7 @@
           <a:p>
             <a:pPr algn="ctr"/>
             <a:r>
-              <a:rPr lang="en-US" sz="750" dirty="0">
+              <a:rPr lang="en-US" sz="750">
                 <a:solidFill>
                   <a:srgbClr val="94A3B8"/>
                 </a:solidFill>
@@ -5736,7 +5755,7 @@
               </a:rPr>
               <a:t>Countries</a:t>
             </a:r>
-            <a:endParaRPr lang="en-US" sz="750" dirty="0"/>
+            <a:endParaRPr lang="en-US" sz="750"/>
           </a:p>
         </p:txBody>
       </p:sp>
@@ -5763,7 +5782,7 @@
           <a:p>
             <a:pPr algn="ctr"/>
             <a:r>
-              <a:rPr lang="en-US" sz="2100" b="1" dirty="0">
+              <a:rPr lang="en-US" sz="2100" b="1">
                 <a:solidFill>
                   <a:srgbClr val="F59E0B"/>
                 </a:solidFill>
@@ -5773,7 +5792,7 @@
               </a:rPr>
               <a:t>23,735</a:t>
             </a:r>
-            <a:endParaRPr lang="en-US" sz="2100" dirty="0"/>
+            <a:endParaRPr lang="en-US" sz="2100"/>
           </a:p>
         </p:txBody>
       </p:sp>
@@ -5800,7 +5819,7 @@
           <a:p>
             <a:pPr algn="ctr"/>
             <a:r>
-              <a:rPr lang="en-US" sz="750" dirty="0">
+              <a:rPr lang="en-US" sz="750">
                 <a:solidFill>
                   <a:srgbClr val="94A3B8"/>
                 </a:solidFill>
@@ -5810,7 +5829,7 @@
               </a:rPr>
               <a:t>Rows Processed</a:t>
             </a:r>
-            <a:endParaRPr lang="en-US" sz="750" dirty="0"/>
+            <a:endParaRPr lang="en-US" sz="750"/>
           </a:p>
         </p:txBody>
       </p:sp>
@@ -5837,7 +5856,7 @@
           <a:p>
             <a:pPr algn="ctr"/>
             <a:r>
-              <a:rPr lang="en-US" sz="2100" b="1" dirty="0">
+              <a:rPr lang="en-US" sz="2100" b="1">
                 <a:solidFill>
                   <a:srgbClr val="F59E0B"/>
                 </a:solidFill>
@@ -5847,7 +5866,7 @@
               </a:rPr>
               <a:t>32</a:t>
             </a:r>
-            <a:endParaRPr lang="en-US" sz="2100" dirty="0"/>
+            <a:endParaRPr lang="en-US" sz="2100"/>
           </a:p>
         </p:txBody>
       </p:sp>
@@ -5874,7 +5893,7 @@
           <a:p>
             <a:pPr algn="ctr"/>
             <a:r>
-              <a:rPr lang="en-US" sz="750" dirty="0">
+              <a:rPr lang="en-US" sz="750">
                 <a:solidFill>
                   <a:srgbClr val="94A3B8"/>
                 </a:solidFill>
@@ -5884,7 +5903,7 @@
               </a:rPr>
               <a:t>Opportunities</a:t>
             </a:r>
-            <a:endParaRPr lang="en-US" sz="750" dirty="0"/>
+            <a:endParaRPr lang="en-US" sz="750"/>
           </a:p>
         </p:txBody>
       </p:sp>
@@ -5911,7 +5930,7 @@
           <a:p>
             <a:pPr algn="ctr"/>
             <a:r>
-              <a:rPr lang="en-US" sz="2100" b="1" dirty="0">
+              <a:rPr lang="en-US" sz="2100" b="1">
                 <a:solidFill>
                   <a:srgbClr val="F59E0B"/>
                 </a:solidFill>
@@ -5921,7 +5940,7 @@
               </a:rPr>
               <a:t>3</a:t>
             </a:r>
-            <a:endParaRPr lang="en-US" sz="2100" dirty="0"/>
+            <a:endParaRPr lang="en-US" sz="2100"/>
           </a:p>
         </p:txBody>
       </p:sp>
@@ -5948,7 +5967,7 @@
           <a:p>
             <a:pPr algn="ctr"/>
             <a:r>
-              <a:rPr lang="en-US" sz="750" dirty="0">
+              <a:rPr lang="en-US" sz="750">
                 <a:solidFill>
                   <a:srgbClr val="94A3B8"/>
                 </a:solidFill>
@@ -5958,7 +5977,7 @@
               </a:rPr>
               <a:t>Report Pages</a:t>
             </a:r>
-            <a:endParaRPr lang="en-US" sz="750" dirty="0"/>
+            <a:endParaRPr lang="en-US" sz="750"/>
           </a:p>
         </p:txBody>
       </p:sp>
@@ -6023,7 +6042,7 @@
           <a:lstStyle/>
           <a:p>
             <a:r>
-              <a:rPr lang="en-US" sz="825" b="1" dirty="0">
+              <a:rPr lang="en-US" sz="825" b="1">
                 <a:solidFill>
                   <a:srgbClr val="0D9488"/>
                 </a:solidFill>
@@ -6033,7 +6052,7 @@
               </a:rPr>
               <a:t>🔗  GitHub Repository</a:t>
             </a:r>
-            <a:endParaRPr lang="en-US" sz="825" dirty="0"/>
+            <a:endParaRPr lang="en-US" sz="825"/>
           </a:p>
         </p:txBody>
       </p:sp>
@@ -6069,7 +6088,7 @@
               </a:rPr>
               <a:t>https://github.com/JHaywardNinetyOne/urbanisation-prospects-assessment</a:t>
             </a:r>
-            <a:endParaRPr lang="en-US" sz="825" dirty="0"/>
+            <a:endParaRPr lang="en-US" sz="825"/>
           </a:p>
         </p:txBody>
       </p:sp>
@@ -6128,7 +6147,7 @@
           <a:p>
             <a:pPr algn="ctr"/>
             <a:r>
-              <a:rPr lang="en-US" sz="750" dirty="0">
+              <a:rPr lang="en-US" sz="750">
                 <a:solidFill>
                   <a:srgbClr val="94A3B8"/>
                 </a:solidFill>
@@ -6138,7 +6157,7 @@
               </a:rPr>
               <a:t>Microsoft Fabric  •  PowerBI  •  Delta Lake  •  PySpark  •  Medallion Architecture  •  GitHub</a:t>
             </a:r>
-            <a:endParaRPr lang="en-US" sz="750" dirty="0"/>
+            <a:endParaRPr lang="en-US" sz="750"/>
           </a:p>
         </p:txBody>
       </p:sp>
@@ -6229,7 +6248,7 @@
           <a:lstStyle/>
           <a:p>
             <a:r>
-              <a:rPr lang="en-US" sz="2700" b="1" dirty="0">
+              <a:rPr lang="en-US" sz="2700" b="1">
                 <a:solidFill>
                   <a:srgbClr val="0D1B2A"/>
                 </a:solidFill>
@@ -6239,7 +6258,7 @@
               </a:rPr>
               <a:t>The Business Problem</a:t>
             </a:r>
-            <a:endParaRPr lang="en-US" sz="2700" dirty="0"/>
+            <a:endParaRPr lang="en-US" sz="2700"/>
           </a:p>
         </p:txBody>
       </p:sp>
@@ -6305,7 +6324,7 @@
           <a:p>
             <a:pPr algn="ctr"/>
             <a:r>
-              <a:rPr lang="en-US" sz="2100" b="1" dirty="0">
+              <a:rPr lang="en-US" sz="2100" b="1">
                 <a:solidFill>
                   <a:srgbClr val="0D9488"/>
                 </a:solidFill>
@@ -6316,7 +6335,7 @@
               <a:t>"</a:t>
             </a:r>
             <a:r>
-              <a:rPr lang="en-US" sz="1500" dirty="0">
+              <a:rPr lang="en-US" sz="1500">
                 <a:solidFill>
                   <a:srgbClr val="FFFFFF"/>
                 </a:solidFill>
@@ -6327,7 +6346,7 @@
               <a:t>Which global markets represent the best opportunity for product expansion?</a:t>
             </a:r>
             <a:r>
-              <a:rPr lang="en-US" sz="2100" b="1" dirty="0">
+              <a:rPr lang="en-US" sz="2100" b="1">
                 <a:solidFill>
                   <a:srgbClr val="0D9488"/>
                 </a:solidFill>
@@ -6337,7 +6356,7 @@
               </a:rPr>
               <a:t>"</a:t>
             </a:r>
-            <a:endParaRPr lang="en-US" sz="2100" dirty="0"/>
+            <a:endParaRPr lang="en-US" sz="2100"/>
           </a:p>
         </p:txBody>
       </p:sp>
@@ -6403,14 +6422,14 @@
           <a:p>
             <a:pPr algn="ctr"/>
             <a:r>
-              <a:rPr lang="en-US" sz="2100" dirty="0">
+              <a:rPr lang="en-US" sz="2100">
                 <a:solidFill>
                   <a:srgbClr val="000000"/>
                 </a:solidFill>
               </a:rPr>
               <a:t>🌍</a:t>
             </a:r>
-            <a:endParaRPr lang="en-US" sz="2100" dirty="0"/>
+            <a:endParaRPr lang="en-US" sz="2100"/>
           </a:p>
         </p:txBody>
       </p:sp>
@@ -6437,7 +6456,7 @@
           <a:p>
             <a:pPr algn="ctr"/>
             <a:r>
-              <a:rPr lang="en-US" sz="1050" b="1" dirty="0">
+              <a:rPr lang="en-US" sz="1050" b="1">
                 <a:solidFill>
                   <a:srgbClr val="0D1B2A"/>
                 </a:solidFill>
@@ -6447,7 +6466,7 @@
               </a:rPr>
               <a:t>Global Scale</a:t>
             </a:r>
-            <a:endParaRPr lang="en-US" sz="1050" dirty="0"/>
+            <a:endParaRPr lang="en-US" sz="1050"/>
           </a:p>
         </p:txBody>
       </p:sp>
@@ -6474,7 +6493,7 @@
           <a:p>
             <a:pPr algn="ctr"/>
             <a:r>
-              <a:rPr lang="en-US" sz="825" dirty="0">
+              <a:rPr lang="en-US" sz="825">
                 <a:solidFill>
                   <a:srgbClr val="94A3B8"/>
                 </a:solidFill>
@@ -6484,7 +6503,7 @@
               </a:rPr>
               <a:t>235 countries across 6 continents with data from 1950 to 2050</a:t>
             </a:r>
-            <a:endParaRPr lang="en-US" sz="825" dirty="0"/>
+            <a:endParaRPr lang="en-US" sz="825"/>
           </a:p>
         </p:txBody>
       </p:sp>
@@ -6550,14 +6569,14 @@
           <a:p>
             <a:pPr algn="ctr"/>
             <a:r>
-              <a:rPr lang="en-US" sz="2100" dirty="0">
+              <a:rPr lang="en-US" sz="2100">
                 <a:solidFill>
                   <a:srgbClr val="000000"/>
                 </a:solidFill>
               </a:rPr>
               <a:t>📊</a:t>
             </a:r>
-            <a:endParaRPr lang="en-US" sz="2100" dirty="0"/>
+            <a:endParaRPr lang="en-US" sz="2100"/>
           </a:p>
         </p:txBody>
       </p:sp>
@@ -6584,7 +6603,7 @@
           <a:p>
             <a:pPr algn="ctr"/>
             <a:r>
-              <a:rPr lang="en-US" sz="1050" b="1" dirty="0">
+              <a:rPr lang="en-US" sz="1050" b="1">
                 <a:solidFill>
                   <a:srgbClr val="0D1B2A"/>
                 </a:solidFill>
@@ -6594,7 +6613,7 @@
               </a:rPr>
               <a:t>Multiple Sources</a:t>
             </a:r>
-            <a:endParaRPr lang="en-US" sz="1050" dirty="0"/>
+            <a:endParaRPr lang="en-US" sz="1050"/>
           </a:p>
         </p:txBody>
       </p:sp>
@@ -6621,7 +6640,7 @@
           <a:p>
             <a:pPr algn="ctr"/>
             <a:r>
-              <a:rPr lang="en-US" sz="825" dirty="0">
+              <a:rPr lang="en-US" sz="825">
                 <a:solidFill>
                   <a:srgbClr val="94A3B8"/>
                 </a:solidFill>
@@ -6631,7 +6650,7 @@
               </a:rPr>
               <a:t>4 datasets with different formats, naming conventions and coverage</a:t>
             </a:r>
-            <a:endParaRPr lang="en-US" sz="825" dirty="0"/>
+            <a:endParaRPr lang="en-US" sz="825"/>
           </a:p>
         </p:txBody>
       </p:sp>
@@ -6697,14 +6716,14 @@
           <a:p>
             <a:pPr algn="ctr"/>
             <a:r>
-              <a:rPr lang="en-US" sz="2100" dirty="0">
+              <a:rPr lang="en-US" sz="2100">
                 <a:solidFill>
                   <a:srgbClr val="000000"/>
                 </a:solidFill>
               </a:rPr>
               <a:t>💡</a:t>
             </a:r>
-            <a:endParaRPr lang="en-US" sz="2100" dirty="0"/>
+            <a:endParaRPr lang="en-US" sz="2100"/>
           </a:p>
         </p:txBody>
       </p:sp>
@@ -6731,7 +6750,7 @@
           <a:p>
             <a:pPr algn="ctr"/>
             <a:r>
-              <a:rPr lang="en-US" sz="1050" b="1" dirty="0">
+              <a:rPr lang="en-US" sz="1050" b="1">
                 <a:solidFill>
                   <a:srgbClr val="0D1B2A"/>
                 </a:solidFill>
@@ -6741,7 +6760,7 @@
               </a:rPr>
               <a:t>Actionable Insight</a:t>
             </a:r>
-            <a:endParaRPr lang="en-US" sz="1050" dirty="0"/>
+            <a:endParaRPr lang="en-US" sz="1050"/>
           </a:p>
         </p:txBody>
       </p:sp>
@@ -6768,7 +6787,7 @@
           <a:p>
             <a:pPr algn="ctr"/>
             <a:r>
-              <a:rPr lang="en-US" sz="825" dirty="0">
+              <a:rPr lang="en-US" sz="825">
                 <a:solidFill>
                   <a:srgbClr val="94A3B8"/>
                 </a:solidFill>
@@ -6778,7 +6797,7 @@
               </a:rPr>
               <a:t>Sales and marketing teams need clear, ranked market recommendations</a:t>
             </a:r>
-            <a:endParaRPr lang="en-US" sz="825" dirty="0"/>
+            <a:endParaRPr lang="en-US" sz="825"/>
           </a:p>
         </p:txBody>
       </p:sp>
@@ -6869,7 +6888,7 @@
           <a:lstStyle/>
           <a:p>
             <a:r>
-              <a:rPr lang="en-US" sz="2700" b="1" dirty="0">
+              <a:rPr lang="en-US" sz="2700" b="1">
                 <a:solidFill>
                   <a:srgbClr val="FFFFFF"/>
                 </a:solidFill>
@@ -6879,7 +6898,7 @@
               </a:rPr>
               <a:t>Solution Architecture</a:t>
             </a:r>
-            <a:endParaRPr lang="en-US" sz="2700" dirty="0"/>
+            <a:endParaRPr lang="en-US" sz="2700"/>
           </a:p>
         </p:txBody>
       </p:sp>
@@ -6905,7 +6924,7 @@
           <a:lstStyle/>
           <a:p>
             <a:r>
-              <a:rPr lang="en-US" sz="1050" dirty="0">
+              <a:rPr lang="en-US" sz="1050">
                 <a:solidFill>
                   <a:srgbClr val="0D9488"/>
                 </a:solidFill>
@@ -6915,7 +6934,7 @@
               </a:rPr>
               <a:t>Medallion Architecture — Bronze → Silver → Gold</a:t>
             </a:r>
-            <a:endParaRPr lang="en-US" sz="1050" dirty="0"/>
+            <a:endParaRPr lang="en-US" sz="1050"/>
           </a:p>
         </p:txBody>
       </p:sp>
@@ -7013,7 +7032,7 @@
           <a:p>
             <a:pPr algn="ctr"/>
             <a:r>
-              <a:rPr lang="en-US" sz="825" b="1" dirty="0">
+              <a:rPr lang="en-US" sz="825" b="1">
                 <a:solidFill>
                   <a:srgbClr val="FFFFFF"/>
                 </a:solidFill>
@@ -7023,7 +7042,7 @@
               </a:rPr>
               <a:t>SOURCE</a:t>
             </a:r>
-            <a:endParaRPr lang="en-US" sz="825" dirty="0"/>
+            <a:endParaRPr lang="en-US" sz="825"/>
           </a:p>
         </p:txBody>
       </p:sp>
@@ -7050,7 +7069,7 @@
           <a:p>
             <a:pPr algn="ctr"/>
             <a:r>
-              <a:rPr lang="en-US" sz="675" dirty="0">
+              <a:rPr lang="en-US" sz="675">
                 <a:solidFill>
                   <a:srgbClr val="14B8A6"/>
                 </a:solidFill>
@@ -7060,7 +7079,7 @@
               </a:rPr>
               <a:t>4 CSV Files</a:t>
             </a:r>
-            <a:endParaRPr lang="en-US" sz="675" dirty="0"/>
+            <a:endParaRPr lang="en-US" sz="675"/>
           </a:p>
         </p:txBody>
       </p:sp>
@@ -7087,7 +7106,7 @@
           <a:p>
             <a:pPr algn="ctr"/>
             <a:r>
-              <a:rPr lang="en-US" sz="750" dirty="0">
+              <a:rPr lang="en-US" sz="750">
                 <a:solidFill>
                   <a:srgbClr val="94A3B8"/>
                 </a:solidFill>
@@ -7097,12 +7116,12 @@
               </a:rPr>
               <a:t>Raw data landing zone</a:t>
             </a:r>
-            <a:endParaRPr lang="en-US" sz="750" dirty="0"/>
+            <a:endParaRPr lang="en-US" sz="750"/>
           </a:p>
           <a:p>
             <a:pPr algn="ctr"/>
             <a:r>
-              <a:rPr lang="en-US" sz="750" dirty="0">
+              <a:rPr lang="en-US" sz="750">
                 <a:solidFill>
                   <a:srgbClr val="94A3B8"/>
                 </a:solidFill>
@@ -7112,7 +7131,7 @@
               </a:rPr>
               <a:t>UN · WID · Continents · WHO</a:t>
             </a:r>
-            <a:endParaRPr lang="en-US" sz="750" dirty="0"/>
+            <a:endParaRPr lang="en-US" sz="750"/>
           </a:p>
         </p:txBody>
       </p:sp>
@@ -7171,14 +7190,14 @@
           <a:p>
             <a:pPr algn="ctr"/>
             <a:r>
-              <a:rPr lang="en-US" sz="900" dirty="0">
+              <a:rPr lang="en-US" sz="900">
                 <a:solidFill>
                   <a:srgbClr val="0D9488"/>
                 </a:solidFill>
               </a:rPr>
               <a:t>▶</a:t>
             </a:r>
-            <a:endParaRPr lang="en-US" sz="900" dirty="0"/>
+            <a:endParaRPr lang="en-US" sz="900"/>
           </a:p>
         </p:txBody>
       </p:sp>
@@ -7276,7 +7295,7 @@
           <a:p>
             <a:pPr algn="ctr"/>
             <a:r>
-              <a:rPr lang="en-US" sz="825" b="1" dirty="0">
+              <a:rPr lang="en-US" sz="825" b="1">
                 <a:solidFill>
                   <a:srgbClr val="FFFFFF"/>
                 </a:solidFill>
@@ -7286,7 +7305,7 @@
               </a:rPr>
               <a:t>BRONZE</a:t>
             </a:r>
-            <a:endParaRPr lang="en-US" sz="825" dirty="0"/>
+            <a:endParaRPr lang="en-US" sz="825"/>
           </a:p>
         </p:txBody>
       </p:sp>
@@ -7313,7 +7332,7 @@
           <a:p>
             <a:pPr algn="ctr"/>
             <a:r>
-              <a:rPr lang="en-US" sz="675" dirty="0">
+              <a:rPr lang="en-US" sz="675">
                 <a:solidFill>
                   <a:srgbClr val="14B8A6"/>
                 </a:solidFill>
@@ -7323,7 +7342,7 @@
               </a:rPr>
               <a:t>Raw Delta Tables</a:t>
             </a:r>
-            <a:endParaRPr lang="en-US" sz="675" dirty="0"/>
+            <a:endParaRPr lang="en-US" sz="675"/>
           </a:p>
         </p:txBody>
       </p:sp>
@@ -7350,7 +7369,7 @@
           <a:p>
             <a:pPr algn="ctr"/>
             <a:r>
-              <a:rPr lang="en-US" sz="750" dirty="0">
+              <a:rPr lang="en-US" sz="750">
                 <a:solidFill>
                   <a:srgbClr val="94A3B8"/>
                 </a:solidFill>
@@ -7360,12 +7379,12 @@
               </a:rPr>
               <a:t>Exact copy + metadata</a:t>
             </a:r>
-            <a:endParaRPr lang="en-US" sz="750" dirty="0"/>
+            <a:endParaRPr lang="en-US" sz="750"/>
           </a:p>
           <a:p>
             <a:pPr algn="ctr"/>
             <a:r>
-              <a:rPr lang="en-US" sz="750" dirty="0">
+              <a:rPr lang="en-US" sz="750">
                 <a:solidFill>
                   <a:srgbClr val="94A3B8"/>
                 </a:solidFill>
@@ -7375,7 +7394,7 @@
               </a:rPr>
               <a:t>Audit trail preserved</a:t>
             </a:r>
-            <a:endParaRPr lang="en-US" sz="750" dirty="0"/>
+            <a:endParaRPr lang="en-US" sz="750"/>
           </a:p>
         </p:txBody>
       </p:sp>
@@ -7434,14 +7453,14 @@
           <a:p>
             <a:pPr algn="ctr"/>
             <a:r>
-              <a:rPr lang="en-US" sz="900" dirty="0">
+              <a:rPr lang="en-US" sz="900">
                 <a:solidFill>
                   <a:srgbClr val="0D9488"/>
                 </a:solidFill>
               </a:rPr>
               <a:t>▶</a:t>
             </a:r>
-            <a:endParaRPr lang="en-US" sz="900" dirty="0"/>
+            <a:endParaRPr lang="en-US" sz="900"/>
           </a:p>
         </p:txBody>
       </p:sp>
@@ -7539,7 +7558,7 @@
           <a:p>
             <a:pPr algn="ctr"/>
             <a:r>
-              <a:rPr lang="en-US" sz="825" b="1" dirty="0">
+              <a:rPr lang="en-US" sz="825" b="1">
                 <a:solidFill>
                   <a:srgbClr val="FFFFFF"/>
                 </a:solidFill>
@@ -7549,7 +7568,7 @@
               </a:rPr>
               <a:t>SILVER</a:t>
             </a:r>
-            <a:endParaRPr lang="en-US" sz="825" dirty="0"/>
+            <a:endParaRPr lang="en-US" sz="825"/>
           </a:p>
         </p:txBody>
       </p:sp>
@@ -7576,7 +7595,7 @@
           <a:p>
             <a:pPr algn="ctr"/>
             <a:r>
-              <a:rPr lang="en-US" sz="675" dirty="0">
+              <a:rPr lang="en-US" sz="675">
                 <a:solidFill>
                   <a:srgbClr val="14B8A6"/>
                 </a:solidFill>
@@ -7586,7 +7605,7 @@
               </a:rPr>
               <a:t>Cleaned &amp; Joined</a:t>
             </a:r>
-            <a:endParaRPr lang="en-US" sz="675" dirty="0"/>
+            <a:endParaRPr lang="en-US" sz="675"/>
           </a:p>
         </p:txBody>
       </p:sp>
@@ -7613,7 +7632,7 @@
           <a:p>
             <a:pPr algn="ctr"/>
             <a:r>
-              <a:rPr lang="en-US" sz="750" dirty="0">
+              <a:rPr lang="en-US" sz="750">
                 <a:solidFill>
                   <a:srgbClr val="94A3B8"/>
                 </a:solidFill>
@@ -7623,12 +7642,12 @@
               </a:rPr>
               <a:t>Standardised, joined</a:t>
             </a:r>
-            <a:endParaRPr lang="en-US" sz="750" dirty="0"/>
+            <a:endParaRPr lang="en-US" sz="750"/>
           </a:p>
           <a:p>
             <a:pPr algn="ctr"/>
             <a:r>
-              <a:rPr lang="en-US" sz="750" dirty="0">
+              <a:rPr lang="en-US" sz="750">
                 <a:solidFill>
                   <a:srgbClr val="94A3B8"/>
                 </a:solidFill>
@@ -7638,7 +7657,7 @@
               </a:rPr>
               <a:t>23,735 rows</a:t>
             </a:r>
-            <a:endParaRPr lang="en-US" sz="750" dirty="0"/>
+            <a:endParaRPr lang="en-US" sz="750"/>
           </a:p>
         </p:txBody>
       </p:sp>
@@ -7697,14 +7716,14 @@
           <a:p>
             <a:pPr algn="ctr"/>
             <a:r>
-              <a:rPr lang="en-US" sz="900" dirty="0">
+              <a:rPr lang="en-US" sz="900">
                 <a:solidFill>
                   <a:srgbClr val="0D9488"/>
                 </a:solidFill>
               </a:rPr>
               <a:t>▶</a:t>
             </a:r>
-            <a:endParaRPr lang="en-US" sz="900" dirty="0"/>
+            <a:endParaRPr lang="en-US" sz="900"/>
           </a:p>
         </p:txBody>
       </p:sp>
@@ -7802,7 +7821,7 @@
           <a:p>
             <a:pPr algn="ctr"/>
             <a:r>
-              <a:rPr lang="en-US" sz="825" b="1" dirty="0">
+              <a:rPr lang="en-US" sz="825" b="1">
                 <a:solidFill>
                   <a:srgbClr val="FFFFFF"/>
                 </a:solidFill>
@@ -7812,7 +7831,7 @@
               </a:rPr>
               <a:t>GOLD</a:t>
             </a:r>
-            <a:endParaRPr lang="en-US" sz="825" dirty="0"/>
+            <a:endParaRPr lang="en-US" sz="825"/>
           </a:p>
         </p:txBody>
       </p:sp>
@@ -7839,7 +7858,7 @@
           <a:p>
             <a:pPr algn="ctr"/>
             <a:r>
-              <a:rPr lang="en-US" sz="675" dirty="0">
+              <a:rPr lang="en-US" sz="675">
                 <a:solidFill>
                   <a:srgbClr val="14B8A6"/>
                 </a:solidFill>
@@ -7849,7 +7868,7 @@
               </a:rPr>
               <a:t>Business Ready</a:t>
             </a:r>
-            <a:endParaRPr lang="en-US" sz="675" dirty="0"/>
+            <a:endParaRPr lang="en-US" sz="675"/>
           </a:p>
         </p:txBody>
       </p:sp>
@@ -7876,7 +7895,7 @@
           <a:p>
             <a:pPr algn="ctr"/>
             <a:r>
-              <a:rPr lang="en-US" sz="750" dirty="0">
+              <a:rPr lang="en-US" sz="750">
                 <a:solidFill>
                   <a:srgbClr val="94A3B8"/>
                 </a:solidFill>
@@ -7886,12 +7905,12 @@
               </a:rPr>
               <a:t>4 aggregated tables</a:t>
             </a:r>
-            <a:endParaRPr lang="en-US" sz="750" dirty="0"/>
+            <a:endParaRPr lang="en-US" sz="750"/>
           </a:p>
           <a:p>
             <a:pPr algn="ctr"/>
             <a:r>
-              <a:rPr lang="en-US" sz="750" dirty="0">
+              <a:rPr lang="en-US" sz="750">
                 <a:solidFill>
                   <a:srgbClr val="94A3B8"/>
                 </a:solidFill>
@@ -7901,7 +7920,7 @@
               </a:rPr>
               <a:t>Optimised for PowerBI</a:t>
             </a:r>
-            <a:endParaRPr lang="en-US" sz="750" dirty="0"/>
+            <a:endParaRPr lang="en-US" sz="750"/>
           </a:p>
         </p:txBody>
       </p:sp>
@@ -7960,14 +7979,14 @@
           <a:p>
             <a:pPr algn="ctr"/>
             <a:r>
-              <a:rPr lang="en-US" sz="900" dirty="0">
+              <a:rPr lang="en-US" sz="900">
                 <a:solidFill>
                   <a:srgbClr val="0D9488"/>
                 </a:solidFill>
               </a:rPr>
               <a:t>▶</a:t>
             </a:r>
-            <a:endParaRPr lang="en-US" sz="900" dirty="0"/>
+            <a:endParaRPr lang="en-US" sz="900"/>
           </a:p>
         </p:txBody>
       </p:sp>
@@ -8065,7 +8084,7 @@
           <a:p>
             <a:pPr algn="ctr"/>
             <a:r>
-              <a:rPr lang="en-US" sz="825" b="1" dirty="0">
+              <a:rPr lang="en-US" sz="825" b="1">
                 <a:solidFill>
                   <a:srgbClr val="FFFFFF"/>
                 </a:solidFill>
@@ -8075,7 +8094,7 @@
               </a:rPr>
               <a:t>POWERBI</a:t>
             </a:r>
-            <a:endParaRPr lang="en-US" sz="825" dirty="0"/>
+            <a:endParaRPr lang="en-US" sz="825"/>
           </a:p>
         </p:txBody>
       </p:sp>
@@ -8102,7 +8121,7 @@
           <a:p>
             <a:pPr algn="ctr"/>
             <a:r>
-              <a:rPr lang="en-US" sz="675" dirty="0">
+              <a:rPr lang="en-US" sz="675">
                 <a:solidFill>
                   <a:srgbClr val="14B8A6"/>
                 </a:solidFill>
@@ -8112,7 +8131,7 @@
               </a:rPr>
               <a:t>Report</a:t>
             </a:r>
-            <a:endParaRPr lang="en-US" sz="675" dirty="0"/>
+            <a:endParaRPr lang="en-US" sz="675"/>
           </a:p>
         </p:txBody>
       </p:sp>
@@ -8139,7 +8158,7 @@
           <a:p>
             <a:pPr algn="ctr"/>
             <a:r>
-              <a:rPr lang="en-US" sz="750" dirty="0">
+              <a:rPr lang="en-US" sz="750">
                 <a:solidFill>
                   <a:srgbClr val="94A3B8"/>
                 </a:solidFill>
@@ -8149,12 +8168,12 @@
               </a:rPr>
               <a:t>3-page dashboard</a:t>
             </a:r>
-            <a:endParaRPr lang="en-US" sz="750" dirty="0"/>
+            <a:endParaRPr lang="en-US" sz="750"/>
           </a:p>
           <a:p>
             <a:pPr algn="ctr"/>
             <a:r>
-              <a:rPr lang="en-US" sz="750" dirty="0">
+              <a:rPr lang="en-US" sz="750">
                 <a:solidFill>
                   <a:srgbClr val="94A3B8"/>
                 </a:solidFill>
@@ -8164,7 +8183,7 @@
               </a:rPr>
               <a:t>Interactive visuals</a:t>
             </a:r>
-            <a:endParaRPr lang="en-US" sz="750" dirty="0"/>
+            <a:endParaRPr lang="en-US" sz="750"/>
           </a:p>
         </p:txBody>
       </p:sp>
@@ -8223,7 +8242,7 @@
           <a:p>
             <a:pPr algn="ctr"/>
             <a:r>
-              <a:rPr lang="en-US" sz="750" dirty="0">
+              <a:rPr lang="en-US" sz="750">
                 <a:solidFill>
                   <a:srgbClr val="0D9488"/>
                 </a:solidFill>
@@ -8233,7 +8252,7 @@
               </a:rPr>
               <a:t>Key Principles:  Separation of Concerns  •  Single Source of Truth  •  Idempotency  •  Transparency</a:t>
             </a:r>
-            <a:endParaRPr lang="en-US" sz="750" dirty="0"/>
+            <a:endParaRPr lang="en-US" sz="750"/>
           </a:p>
         </p:txBody>
       </p:sp>
@@ -8316,48 +8335,6 @@
       </p:sp>
       <p:sp>
         <p:nvSpPr>
-          <p:cNvPr id="3" name="Shape 1">
-            <a:extLst>
-              <a:ext uri="{FF2B5EF4-FFF2-40B4-BE49-F238E27FC236}">
-                <a16:creationId xmlns:a16="http://schemas.microsoft.com/office/drawing/2014/main" id="{DCDE7B3F-3142-7DBE-036A-95A50D72349B}"/>
-              </a:ext>
-            </a:extLst>
-          </p:cNvPr>
-          <p:cNvSpPr/>
-          <p:nvPr/>
-        </p:nvSpPr>
-        <p:spPr>
-          <a:xfrm>
-            <a:off x="5349240" y="94298"/>
-            <a:ext cx="2400300" cy="2400300"/>
-          </a:xfrm>
-          <a:prstGeom prst="ellipse">
-            <a:avLst/>
-          </a:prstGeom>
-          <a:solidFill>
-            <a:srgbClr val="0D9488">
-              <a:alpha val="15000"/>
-            </a:srgbClr>
-          </a:solidFill>
-          <a:ln w="12700">
-            <a:solidFill>
-              <a:srgbClr val="0D9488">
-                <a:alpha val="15000"/>
-              </a:srgbClr>
-            </a:solidFill>
-            <a:prstDash val="solid"/>
-          </a:ln>
-        </p:spPr>
-        <p:txBody>
-          <a:bodyPr/>
-          <a:lstStyle/>
-          <a:p>
-            <a:endParaRPr lang="en-US" sz="1350"/>
-          </a:p>
-        </p:txBody>
-      </p:sp>
-      <p:sp>
-        <p:nvSpPr>
           <p:cNvPr id="5" name="Text 3">
             <a:extLst>
               <a:ext uri="{FF2B5EF4-FFF2-40B4-BE49-F238E27FC236}">
@@ -8370,7 +8347,7 @@
         </p:nvSpPr>
         <p:spPr>
           <a:xfrm>
-            <a:off x="342900" y="853952"/>
+            <a:off x="342900" y="692376"/>
             <a:ext cx="5486400" cy="240030"/>
           </a:xfrm>
           <a:prstGeom prst="rect">
@@ -8384,7 +8361,7 @@
           <a:lstStyle/>
           <a:p>
             <a:r>
-              <a:rPr lang="en-US" b="1" dirty="0" err="1">
+              <a:rPr lang="en-US" b="1" err="1">
                 <a:solidFill>
                   <a:srgbClr val="2BAEAB"/>
                 </a:solidFill>
@@ -8392,7 +8369,7 @@
               <a:t>Urbanisation</a:t>
             </a:r>
             <a:r>
-              <a:rPr lang="en-US" b="1" dirty="0">
+              <a:rPr lang="en-US" b="1">
                 <a:solidFill>
                   <a:srgbClr val="2BAEAB"/>
                 </a:solidFill>
@@ -8469,7 +8446,7 @@
           <a:p>
             <a:pPr algn="ctr"/>
             <a:r>
-              <a:rPr lang="en-US" sz="750" dirty="0">
+              <a:rPr lang="en-US" sz="750">
                 <a:solidFill>
                   <a:srgbClr val="94A3B8"/>
                 </a:solidFill>
@@ -8479,16 +8456,16 @@
               </a:rPr>
               <a:t>Microsoft Fabric  •  PowerBI  •  Delta Lake  •  Medallion Architecture</a:t>
             </a:r>
-            <a:endParaRPr lang="en-US" sz="750" dirty="0"/>
+            <a:endParaRPr lang="en-US" sz="750"/>
           </a:p>
         </p:txBody>
       </p:sp>
       <p:pic>
         <p:nvPicPr>
-          <p:cNvPr id="20" name="Picture 19">
+          <p:cNvPr id="4" name="Picture 3" descr="A diagram of a business structure&#10;&#10;AI-generated content may be incorrect.">
             <a:extLst>
               <a:ext uri="{FF2B5EF4-FFF2-40B4-BE49-F238E27FC236}">
-                <a16:creationId xmlns:a16="http://schemas.microsoft.com/office/drawing/2014/main" id="{41A99828-7B26-7F73-3034-E379CF27D6A3}"/>
+                <a16:creationId xmlns:a16="http://schemas.microsoft.com/office/drawing/2014/main" id="{43747789-D68F-A930-4098-3FD10610C175}"/>
               </a:ext>
             </a:extLst>
           </p:cNvPr>
@@ -8499,7 +8476,7 @@
         </p:nvPicPr>
         <p:blipFill>
           <a:blip r:embed="rId3">
-            <a:alphaModFix amt="45000"/>
+            <a:alphaModFix amt="94000"/>
           </a:blip>
           <a:stretch>
             <a:fillRect/>
@@ -8507,8 +8484,8 @@
         </p:blipFill>
         <p:spPr>
           <a:xfrm>
-            <a:off x="179363" y="1403049"/>
-            <a:ext cx="6457071" cy="2732193"/>
+            <a:off x="0" y="1100604"/>
+            <a:ext cx="6858000" cy="2942291"/>
           </a:xfrm>
           <a:prstGeom prst="rect">
             <a:avLst/>
@@ -8607,7 +8584,7 @@
           <a:lstStyle/>
           <a:p>
             <a:r>
-              <a:rPr lang="en-US" sz="2700" b="1" dirty="0">
+              <a:rPr lang="en-US" sz="2700" b="1">
                 <a:solidFill>
                   <a:srgbClr val="0D1B2A"/>
                 </a:solidFill>
@@ -8617,7 +8594,7 @@
               </a:rPr>
               <a:t>Data Sources</a:t>
             </a:r>
-            <a:endParaRPr lang="en-US" sz="2700" dirty="0"/>
+            <a:endParaRPr lang="en-US" sz="2700"/>
           </a:p>
         </p:txBody>
       </p:sp>
@@ -8683,7 +8660,7 @@
                         <a:buNone/>
                       </a:pPr>
                       <a:r>
-                        <a:rPr lang="en-US" sz="800" b="1" dirty="0">
+                        <a:rPr lang="en-US" sz="800" b="1">
                           <a:solidFill>
                             <a:srgbClr val="FFFFFF"/>
                           </a:solidFill>
@@ -8693,7 +8670,7 @@
                         </a:rPr>
                         <a:t>Source</a:t>
                       </a:r>
-                      <a:endParaRPr lang="en-US" sz="800" dirty="0">
+                      <a:endParaRPr lang="en-US" sz="800">
                         <a:latin typeface="Calibri" charset="0"/>
                         <a:ea typeface="Calibri" charset="0"/>
                         <a:cs typeface="Calibri" charset="0"/>
@@ -8751,7 +8728,7 @@
                         <a:buNone/>
                       </a:pPr>
                       <a:r>
-                        <a:rPr lang="en-US" sz="800" b="1" dirty="0">
+                        <a:rPr lang="en-US" sz="800" b="1">
                           <a:solidFill>
                             <a:srgbClr val="FFFFFF"/>
                           </a:solidFill>
@@ -8761,7 +8738,7 @@
                         </a:rPr>
                         <a:t>Rows</a:t>
                       </a:r>
-                      <a:endParaRPr lang="en-US" sz="800" dirty="0">
+                      <a:endParaRPr lang="en-US" sz="800">
                         <a:latin typeface="Calibri" charset="0"/>
                         <a:ea typeface="Calibri" charset="0"/>
                         <a:cs typeface="Calibri" charset="0"/>
@@ -8819,7 +8796,7 @@
                         <a:buNone/>
                       </a:pPr>
                       <a:r>
-                        <a:rPr lang="en-US" sz="800" b="1" dirty="0">
+                        <a:rPr lang="en-US" sz="800" b="1">
                           <a:solidFill>
                             <a:srgbClr val="FFFFFF"/>
                           </a:solidFill>
@@ -8829,7 +8806,7 @@
                         </a:rPr>
                         <a:t>Key Columns</a:t>
                       </a:r>
-                      <a:endParaRPr lang="en-US" sz="800" dirty="0">
+                      <a:endParaRPr lang="en-US" sz="800">
                         <a:latin typeface="Calibri" charset="0"/>
                         <a:ea typeface="Calibri" charset="0"/>
                         <a:cs typeface="Calibri" charset="0"/>
@@ -8887,7 +8864,7 @@
                         <a:buNone/>
                       </a:pPr>
                       <a:r>
-                        <a:rPr lang="en-US" sz="800" b="1" dirty="0">
+                        <a:rPr lang="en-US" sz="800" b="1">
                           <a:solidFill>
                             <a:srgbClr val="FFFFFF"/>
                           </a:solidFill>
@@ -8897,7 +8874,7 @@
                         </a:rPr>
                         <a:t>Challenge</a:t>
                       </a:r>
-                      <a:endParaRPr lang="en-US" sz="800" dirty="0">
+                      <a:endParaRPr lang="en-US" sz="800">
                         <a:latin typeface="Calibri" charset="0"/>
                         <a:ea typeface="Calibri" charset="0"/>
                         <a:cs typeface="Calibri" charset="0"/>
@@ -8962,7 +8939,7 @@
                         <a:buNone/>
                       </a:pPr>
                       <a:r>
-                        <a:rPr lang="en-US" sz="800" dirty="0">
+                        <a:rPr lang="en-US" sz="800">
                           <a:solidFill>
                             <a:srgbClr val="0D1B2A"/>
                           </a:solidFill>
@@ -8972,7 +8949,7 @@
                         </a:rPr>
                         <a:t>UN World Urbanisation Prospects 2018</a:t>
                       </a:r>
-                      <a:endParaRPr lang="en-US" sz="800" dirty="0">
+                      <a:endParaRPr lang="en-US" sz="800">
                         <a:latin typeface="Calibri" charset="0"/>
                         <a:ea typeface="Calibri" charset="0"/>
                         <a:cs typeface="Calibri" charset="0"/>
@@ -9030,7 +9007,7 @@
                         <a:buNone/>
                       </a:pPr>
                       <a:r>
-                        <a:rPr lang="en-US" sz="800" dirty="0">
+                        <a:rPr lang="en-US" sz="800">
                           <a:solidFill>
                             <a:srgbClr val="0D1B2A"/>
                           </a:solidFill>
@@ -9040,7 +9017,7 @@
                         </a:rPr>
                         <a:t>27,573</a:t>
                       </a:r>
-                      <a:endParaRPr lang="en-US" sz="800" dirty="0">
+                      <a:endParaRPr lang="en-US" sz="800">
                         <a:latin typeface="Calibri" charset="0"/>
                         <a:ea typeface="Calibri" charset="0"/>
                         <a:cs typeface="Calibri" charset="0"/>
@@ -9098,7 +9075,7 @@
                         <a:buNone/>
                       </a:pPr>
                       <a:r>
-                        <a:rPr lang="en-US" sz="800" dirty="0">
+                        <a:rPr lang="en-US" sz="800">
                           <a:solidFill>
                             <a:srgbClr val="0D1B2A"/>
                           </a:solidFill>
@@ -9108,7 +9085,7 @@
                         </a:rPr>
                         <a:t>Entity, Year, Urban Pop, Rural Pop</a:t>
                       </a:r>
-                      <a:endParaRPr lang="en-US" sz="800" dirty="0">
+                      <a:endParaRPr lang="en-US" sz="800">
                         <a:latin typeface="Calibri" charset="0"/>
                         <a:ea typeface="Calibri" charset="0"/>
                         <a:cs typeface="Calibri" charset="0"/>
@@ -9166,7 +9143,7 @@
                         <a:buNone/>
                       </a:pPr>
                       <a:r>
-                        <a:rPr lang="en-US" sz="800" dirty="0">
+                        <a:rPr lang="en-US" sz="800">
                           <a:solidFill>
                             <a:srgbClr val="0D1B2A"/>
                           </a:solidFill>
@@ -9176,7 +9153,7 @@
                         </a:rPr>
                         <a:t>Contains regional aggregates — filtered out</a:t>
                       </a:r>
-                      <a:endParaRPr lang="en-US" sz="800" dirty="0">
+                      <a:endParaRPr lang="en-US" sz="800">
                         <a:latin typeface="Calibri" charset="0"/>
                         <a:ea typeface="Calibri" charset="0"/>
                         <a:cs typeface="Calibri" charset="0"/>
@@ -9241,7 +9218,7 @@
                         <a:buNone/>
                       </a:pPr>
                       <a:r>
-                        <a:rPr lang="en-US" sz="800" dirty="0">
+                        <a:rPr lang="en-US" sz="800">
                           <a:solidFill>
                             <a:srgbClr val="0D1B2A"/>
                           </a:solidFill>
@@ -9251,7 +9228,7 @@
                         </a:rPr>
                         <a:t>World Inequality Database — Pretax Income</a:t>
                       </a:r>
-                      <a:endParaRPr lang="en-US" sz="800" dirty="0">
+                      <a:endParaRPr lang="en-US" sz="800">
                         <a:latin typeface="Calibri" charset="0"/>
                         <a:ea typeface="Calibri" charset="0"/>
                         <a:cs typeface="Calibri" charset="0"/>
@@ -9309,7 +9286,7 @@
                         <a:buNone/>
                       </a:pPr>
                       <a:r>
-                        <a:rPr lang="en-US" sz="800" dirty="0">
+                        <a:rPr lang="en-US" sz="800">
                           <a:solidFill>
                             <a:srgbClr val="0D1B2A"/>
                           </a:solidFill>
@@ -9319,7 +9296,7 @@
                         </a:rPr>
                         <a:t>7,078</a:t>
                       </a:r>
-                      <a:endParaRPr lang="en-US" sz="800" dirty="0">
+                      <a:endParaRPr lang="en-US" sz="800">
                         <a:latin typeface="Calibri" charset="0"/>
                         <a:ea typeface="Calibri" charset="0"/>
                         <a:cs typeface="Calibri" charset="0"/>
@@ -9377,7 +9354,7 @@
                         <a:buNone/>
                       </a:pPr>
                       <a:r>
-                        <a:rPr lang="en-US" sz="800" dirty="0">
+                        <a:rPr lang="en-US" sz="800">
                           <a:solidFill>
                             <a:srgbClr val="0D1B2A"/>
                           </a:solidFill>
@@ -9387,7 +9364,7 @@
                         </a:rPr>
                         <a:t>Entity, Year, Mean Income, Gini</a:t>
                       </a:r>
-                      <a:endParaRPr lang="en-US" sz="800" dirty="0">
+                      <a:endParaRPr lang="en-US" sz="800">
                         <a:latin typeface="Calibri" charset="0"/>
                         <a:ea typeface="Calibri" charset="0"/>
                         <a:cs typeface="Calibri" charset="0"/>
@@ -9445,7 +9422,7 @@
                         <a:buNone/>
                       </a:pPr>
                       <a:r>
-                        <a:rPr lang="en-US" sz="800" dirty="0">
+                        <a:rPr lang="en-US" sz="800">
                           <a:solidFill>
                             <a:srgbClr val="0D1B2A"/>
                           </a:solidFill>
@@ -9455,7 +9432,7 @@
                         </a:rPr>
                         <a:t>Sparse coverage — 64% of countries</a:t>
                       </a:r>
-                      <a:endParaRPr lang="en-US" sz="800" dirty="0">
+                      <a:endParaRPr lang="en-US" sz="800">
                         <a:latin typeface="Calibri" charset="0"/>
                         <a:ea typeface="Calibri" charset="0"/>
                         <a:cs typeface="Calibri" charset="0"/>
@@ -9520,7 +9497,7 @@
                         <a:buNone/>
                       </a:pPr>
                       <a:r>
-                        <a:rPr lang="en-US" sz="800" dirty="0">
+                        <a:rPr lang="en-US" sz="800">
                           <a:solidFill>
                             <a:srgbClr val="0D1B2A"/>
                           </a:solidFill>
@@ -9530,7 +9507,7 @@
                         </a:rPr>
                         <a:t>Countries &amp; Continents</a:t>
                       </a:r>
-                      <a:endParaRPr lang="en-US" sz="800" dirty="0">
+                      <a:endParaRPr lang="en-US" sz="800">
                         <a:latin typeface="Calibri" charset="0"/>
                         <a:ea typeface="Calibri" charset="0"/>
                         <a:cs typeface="Calibri" charset="0"/>
@@ -9588,7 +9565,7 @@
                         <a:buNone/>
                       </a:pPr>
                       <a:r>
-                        <a:rPr lang="en-US" sz="800" dirty="0">
+                        <a:rPr lang="en-US" sz="800">
                           <a:solidFill>
                             <a:srgbClr val="0D1B2A"/>
                           </a:solidFill>
@@ -9598,7 +9575,7 @@
                         </a:rPr>
                         <a:t>285</a:t>
                       </a:r>
-                      <a:endParaRPr lang="en-US" sz="800" dirty="0">
+                      <a:endParaRPr lang="en-US" sz="800">
                         <a:latin typeface="Calibri" charset="0"/>
                         <a:ea typeface="Calibri" charset="0"/>
                         <a:cs typeface="Calibri" charset="0"/>
@@ -9656,7 +9633,7 @@
                         <a:buNone/>
                       </a:pPr>
                       <a:r>
-                        <a:rPr lang="en-US" sz="800" dirty="0">
+                        <a:rPr lang="en-US" sz="800">
                           <a:solidFill>
                             <a:srgbClr val="0D1B2A"/>
                           </a:solidFill>
@@ -9666,7 +9643,7 @@
                         </a:rPr>
                         <a:t>Entity, Continent</a:t>
                       </a:r>
-                      <a:endParaRPr lang="en-US" sz="800" dirty="0">
+                      <a:endParaRPr lang="en-US" sz="800">
                         <a:latin typeface="Calibri" charset="0"/>
                         <a:ea typeface="Calibri" charset="0"/>
                         <a:cs typeface="Calibri" charset="0"/>
@@ -9724,7 +9701,7 @@
                         <a:buNone/>
                       </a:pPr>
                       <a:r>
-                        <a:rPr lang="en-US" sz="800" dirty="0">
+                        <a:rPr lang="en-US" sz="800">
                           <a:solidFill>
                             <a:srgbClr val="0D1B2A"/>
                           </a:solidFill>
@@ -9734,7 +9711,7 @@
                         </a:rPr>
                         <a:t>Name mismatches with other datasets</a:t>
                       </a:r>
-                      <a:endParaRPr lang="en-US" sz="800" dirty="0">
+                      <a:endParaRPr lang="en-US" sz="800">
                         <a:latin typeface="Calibri" charset="0"/>
                         <a:ea typeface="Calibri" charset="0"/>
                         <a:cs typeface="Calibri" charset="0"/>
@@ -9799,7 +9776,7 @@
                         <a:buNone/>
                       </a:pPr>
                       <a:r>
-                        <a:rPr lang="en-US" sz="800" dirty="0">
+                        <a:rPr lang="en-US" sz="800">
                           <a:solidFill>
                             <a:srgbClr val="0D1B2A"/>
                           </a:solidFill>
@@ -9809,7 +9786,7 @@
                         </a:rPr>
                         <a:t>OWID Country to WHO Regions</a:t>
                       </a:r>
-                      <a:endParaRPr lang="en-US" sz="800" dirty="0">
+                      <a:endParaRPr lang="en-US" sz="800">
                         <a:latin typeface="Calibri" charset="0"/>
                         <a:ea typeface="Calibri" charset="0"/>
                         <a:cs typeface="Calibri" charset="0"/>
@@ -9867,7 +9844,7 @@
                         <a:buNone/>
                       </a:pPr>
                       <a:r>
-                        <a:rPr lang="en-US" sz="800" dirty="0">
+                        <a:rPr lang="en-US" sz="800">
                           <a:solidFill>
                             <a:srgbClr val="0D1B2A"/>
                           </a:solidFill>
@@ -9877,7 +9854,7 @@
                         </a:rPr>
                         <a:t>194</a:t>
                       </a:r>
-                      <a:endParaRPr lang="en-US" sz="800" dirty="0">
+                      <a:endParaRPr lang="en-US" sz="800">
                         <a:latin typeface="Calibri" charset="0"/>
                         <a:ea typeface="Calibri" charset="0"/>
                         <a:cs typeface="Calibri" charset="0"/>
@@ -9935,7 +9912,7 @@
                         <a:buNone/>
                       </a:pPr>
                       <a:r>
-                        <a:rPr lang="en-US" sz="800" dirty="0">
+                        <a:rPr lang="en-US" sz="800">
                           <a:solidFill>
                             <a:srgbClr val="0D1B2A"/>
                           </a:solidFill>
@@ -9945,7 +9922,7 @@
                         </a:rPr>
                         <a:t>Entity, WHO Region</a:t>
                       </a:r>
-                      <a:endParaRPr lang="en-US" sz="800" dirty="0">
+                      <a:endParaRPr lang="en-US" sz="800">
                         <a:latin typeface="Calibri" charset="0"/>
                         <a:ea typeface="Calibri" charset="0"/>
                         <a:cs typeface="Calibri" charset="0"/>
@@ -10003,7 +9980,7 @@
                         <a:buNone/>
                       </a:pPr>
                       <a:r>
-                        <a:rPr lang="en-US" sz="800" dirty="0">
+                        <a:rPr lang="en-US" sz="800">
                           <a:solidFill>
                             <a:srgbClr val="0D1B2A"/>
                           </a:solidFill>
@@ -10013,7 +9990,7 @@
                         </a:rPr>
                         <a:t>Different country name format</a:t>
                       </a:r>
-                      <a:endParaRPr lang="en-US" sz="800" dirty="0">
+                      <a:endParaRPr lang="en-US" sz="800">
                         <a:latin typeface="Calibri" charset="0"/>
                         <a:ea typeface="Calibri" charset="0"/>
                         <a:cs typeface="Calibri" charset="0"/>
@@ -10133,7 +10110,7 @@
           <a:lstStyle/>
           <a:p>
             <a:r>
-              <a:rPr lang="en-US" sz="975" b="1" dirty="0">
+              <a:rPr lang="en-US" sz="975" b="1">
                 <a:solidFill>
                   <a:srgbClr val="F59E0B"/>
                 </a:solidFill>
@@ -10143,7 +10120,7 @@
               </a:rPr>
               <a:t>🔑  Key Engineering Challenge</a:t>
             </a:r>
-            <a:endParaRPr lang="en-US" sz="975" dirty="0"/>
+            <a:endParaRPr lang="en-US" sz="975"/>
           </a:p>
         </p:txBody>
       </p:sp>
@@ -10169,7 +10146,7 @@
           <a:lstStyle/>
           <a:p>
             <a:r>
-              <a:rPr lang="en-US" sz="825" dirty="0">
+              <a:rPr lang="en-US" sz="825">
                 <a:solidFill>
                   <a:srgbClr val="FFFFFF"/>
                 </a:solidFill>
@@ -10179,7 +10156,7 @@
               </a:rPr>
               <a:t>All four datasets refer to countries differently — full UN names, common names, ISO codes. I solved this by building a Country Dimension Table that standardises 233 countries into a single source of truth.</a:t>
             </a:r>
-            <a:endParaRPr lang="en-US" sz="825" dirty="0"/>
+            <a:endParaRPr lang="en-US" sz="825"/>
           </a:p>
         </p:txBody>
       </p:sp>
@@ -10270,7 +10247,7 @@
           <a:lstStyle/>
           <a:p>
             <a:r>
-              <a:rPr lang="en-US" sz="2000" b="1" dirty="0">
+              <a:rPr lang="en-US" sz="2000" b="1">
                 <a:solidFill>
                   <a:srgbClr val="FFFFFF"/>
                 </a:solidFill>
@@ -10280,7 +10257,7 @@
               </a:rPr>
               <a:t>Real-World Data Engineering Challenge</a:t>
             </a:r>
-            <a:endParaRPr lang="en-US" sz="2000" dirty="0"/>
+            <a:endParaRPr lang="en-US" sz="2000"/>
           </a:p>
         </p:txBody>
       </p:sp>
@@ -10306,7 +10283,7 @@
           <a:lstStyle/>
           <a:p>
             <a:r>
-              <a:rPr lang="en-US" sz="1200" dirty="0">
+              <a:rPr lang="en-US" sz="1200">
                 <a:solidFill>
                   <a:srgbClr val="0D9488"/>
                 </a:solidFill>
@@ -10316,7 +10293,7 @@
               </a:rPr>
               <a:t>The Country Name Problem</a:t>
             </a:r>
-            <a:endParaRPr lang="en-US" sz="1200" dirty="0"/>
+            <a:endParaRPr lang="en-US" sz="1200"/>
           </a:p>
         </p:txBody>
       </p:sp>
@@ -10368,7 +10345,7 @@
                         <a:buNone/>
                       </a:pPr>
                       <a:r>
-                        <a:rPr lang="en-US" sz="900" b="1" dirty="0">
+                        <a:rPr lang="en-US" sz="900" b="1">
                           <a:solidFill>
                             <a:srgbClr val="FFFFFF"/>
                           </a:solidFill>
@@ -10378,7 +10355,7 @@
                         </a:rPr>
                         <a:t>Dataset</a:t>
                       </a:r>
-                      <a:endParaRPr lang="en-US" sz="900" dirty="0">
+                      <a:endParaRPr lang="en-US" sz="900">
                         <a:latin typeface="Calibri" charset="0"/>
                         <a:ea typeface="Calibri" charset="0"/>
                         <a:cs typeface="Calibri" charset="0"/>
@@ -10436,7 +10413,7 @@
                         <a:buNone/>
                       </a:pPr>
                       <a:r>
-                        <a:rPr lang="en-US" sz="900" b="1" dirty="0">
+                        <a:rPr lang="en-US" sz="900" b="1">
                           <a:solidFill>
                             <a:srgbClr val="FFFFFF"/>
                           </a:solidFill>
@@ -10446,7 +10423,7 @@
                         </a:rPr>
                         <a:t>How 'South Africa' appears</a:t>
                       </a:r>
-                      <a:endParaRPr lang="en-US" sz="900" dirty="0">
+                      <a:endParaRPr lang="en-US" sz="900">
                         <a:latin typeface="Calibri" charset="0"/>
                         <a:ea typeface="Calibri" charset="0"/>
                         <a:cs typeface="Calibri" charset="0"/>
@@ -10511,7 +10488,7 @@
                         <a:buNone/>
                       </a:pPr>
                       <a:r>
-                        <a:rPr lang="en-US" sz="900" dirty="0">
+                        <a:rPr lang="en-US" sz="900">
                           <a:solidFill>
                             <a:srgbClr val="FFFFFF"/>
                           </a:solidFill>
@@ -10521,7 +10498,7 @@
                         </a:rPr>
                         <a:t>UN Urbanisation</a:t>
                       </a:r>
-                      <a:endParaRPr lang="en-US" sz="900" dirty="0">
+                      <a:endParaRPr lang="en-US" sz="900">
                         <a:latin typeface="Calibri" charset="0"/>
                         <a:ea typeface="Calibri" charset="0"/>
                         <a:cs typeface="Calibri" charset="0"/>
@@ -10579,7 +10556,7 @@
                         <a:buNone/>
                       </a:pPr>
                       <a:r>
-                        <a:rPr lang="en-US" sz="900" dirty="0">
+                        <a:rPr lang="en-US" sz="900">
                           <a:solidFill>
                             <a:srgbClr val="14B8A6"/>
                           </a:solidFill>
@@ -10589,7 +10566,7 @@
                         </a:rPr>
                         <a:t>South Africa</a:t>
                       </a:r>
-                      <a:endParaRPr lang="en-US" sz="900" dirty="0">
+                      <a:endParaRPr lang="en-US" sz="900">
                         <a:latin typeface="Calibri" charset="0"/>
                         <a:ea typeface="Calibri" charset="0"/>
                         <a:cs typeface="Calibri" charset="0"/>
@@ -10654,7 +10631,7 @@
                         <a:buNone/>
                       </a:pPr>
                       <a:r>
-                        <a:rPr lang="en-US" sz="900" dirty="0">
+                        <a:rPr lang="en-US" sz="900">
                           <a:solidFill>
                             <a:srgbClr val="FFFFFF"/>
                           </a:solidFill>
@@ -10664,7 +10641,7 @@
                         </a:rPr>
                         <a:t>WID Income</a:t>
                       </a:r>
-                      <a:endParaRPr lang="en-US" sz="900" dirty="0">
+                      <a:endParaRPr lang="en-US" sz="900">
                         <a:latin typeface="Calibri" charset="0"/>
                         <a:ea typeface="Calibri" charset="0"/>
                         <a:cs typeface="Calibri" charset="0"/>
@@ -10722,7 +10699,7 @@
                         <a:buNone/>
                       </a:pPr>
                       <a:r>
-                        <a:rPr lang="en-US" sz="900" dirty="0">
+                        <a:rPr lang="en-US" sz="900">
                           <a:solidFill>
                             <a:srgbClr val="F59E0B"/>
                           </a:solidFill>
@@ -10732,7 +10709,7 @@
                         </a:rPr>
                         <a:t>ZA</a:t>
                       </a:r>
-                      <a:endParaRPr lang="en-US" sz="900" dirty="0">
+                      <a:endParaRPr lang="en-US" sz="900">
                         <a:latin typeface="Calibri" charset="0"/>
                         <a:ea typeface="Calibri" charset="0"/>
                         <a:cs typeface="Calibri" charset="0"/>
@@ -10797,7 +10774,7 @@
                         <a:buNone/>
                       </a:pPr>
                       <a:r>
-                        <a:rPr lang="en-US" sz="900" dirty="0">
+                        <a:rPr lang="en-US" sz="900">
                           <a:solidFill>
                             <a:srgbClr val="FFFFFF"/>
                           </a:solidFill>
@@ -10807,7 +10784,7 @@
                         </a:rPr>
                         <a:t>Countries &amp; Continents</a:t>
                       </a:r>
-                      <a:endParaRPr lang="en-US" sz="900" dirty="0">
+                      <a:endParaRPr lang="en-US" sz="900">
                         <a:latin typeface="Calibri" charset="0"/>
                         <a:ea typeface="Calibri" charset="0"/>
                         <a:cs typeface="Calibri" charset="0"/>
@@ -10865,7 +10842,7 @@
                         <a:buNone/>
                       </a:pPr>
                       <a:r>
-                        <a:rPr lang="en-US" sz="900" dirty="0">
+                        <a:rPr lang="en-US" sz="900">
                           <a:solidFill>
                             <a:srgbClr val="14B8A6"/>
                           </a:solidFill>
@@ -10875,7 +10852,7 @@
                         </a:rPr>
                         <a:t>South Africa</a:t>
                       </a:r>
-                      <a:endParaRPr lang="en-US" sz="900" dirty="0">
+                      <a:endParaRPr lang="en-US" sz="900">
                         <a:latin typeface="Calibri" charset="0"/>
                         <a:ea typeface="Calibri" charset="0"/>
                         <a:cs typeface="Calibri" charset="0"/>
@@ -10940,7 +10917,7 @@
                         <a:buNone/>
                       </a:pPr>
                       <a:r>
-                        <a:rPr lang="en-US" sz="900" dirty="0">
+                        <a:rPr lang="en-US" sz="900">
                           <a:solidFill>
                             <a:srgbClr val="FFFFFF"/>
                           </a:solidFill>
@@ -10950,7 +10927,7 @@
                         </a:rPr>
                         <a:t>OWID WHO Regions</a:t>
                       </a:r>
-                      <a:endParaRPr lang="en-US" sz="900" dirty="0">
+                      <a:endParaRPr lang="en-US" sz="900">
                         <a:latin typeface="Calibri" charset="0"/>
                         <a:ea typeface="Calibri" charset="0"/>
                         <a:cs typeface="Calibri" charset="0"/>
@@ -11008,7 +10985,7 @@
                         <a:buNone/>
                       </a:pPr>
                       <a:r>
-                        <a:rPr lang="en-US" sz="900" dirty="0">
+                        <a:rPr lang="en-US" sz="900">
                           <a:solidFill>
                             <a:srgbClr val="F59E0B"/>
                           </a:solidFill>
@@ -11018,7 +10995,7 @@
                         </a:rPr>
                         <a:t>South Africa  /  ZAF</a:t>
                       </a:r>
-                      <a:endParaRPr lang="en-US" sz="900" dirty="0">
+                      <a:endParaRPr lang="en-US" sz="900">
                         <a:latin typeface="Calibri" charset="0"/>
                         <a:ea typeface="Calibri" charset="0"/>
                         <a:cs typeface="Calibri" charset="0"/>
@@ -11138,7 +11115,7 @@
           <a:lstStyle/>
           <a:p>
             <a:r>
-              <a:rPr lang="en-US" sz="1050" b="1" dirty="0">
+              <a:rPr lang="en-US" sz="1050" b="1">
                 <a:solidFill>
                   <a:srgbClr val="0D9488"/>
                 </a:solidFill>
@@ -11148,7 +11125,7 @@
               </a:rPr>
               <a:t>✅  Solution</a:t>
             </a:r>
-            <a:endParaRPr lang="en-US" sz="1050" dirty="0"/>
+            <a:endParaRPr lang="en-US" sz="1050"/>
           </a:p>
         </p:txBody>
       </p:sp>
@@ -11174,7 +11151,7 @@
           <a:lstStyle/>
           <a:p>
             <a:r>
-              <a:rPr lang="en-US" sz="825" b="1" dirty="0">
+              <a:rPr lang="en-US" sz="825" b="1">
                 <a:solidFill>
                   <a:srgbClr val="FFFFFF"/>
                 </a:solidFill>
@@ -11184,11 +11161,11 @@
               </a:rPr>
               <a:t>Country Dimension Table</a:t>
             </a:r>
-            <a:endParaRPr lang="en-US" sz="825" dirty="0"/>
-          </a:p>
-          <a:p>
-            <a:r>
-              <a:rPr lang="en-US" sz="825" dirty="0">
+            <a:endParaRPr lang="en-US" sz="825"/>
+          </a:p>
+          <a:p>
+            <a:r>
+              <a:rPr lang="en-US" sz="825">
                 <a:solidFill>
                   <a:srgbClr val="FFFFFF"/>
                 </a:solidFill>
@@ -11198,11 +11175,11 @@
               </a:rPr>
               <a:t> </a:t>
             </a:r>
-            <a:endParaRPr lang="en-US" sz="825" dirty="0"/>
-          </a:p>
-          <a:p>
-            <a:r>
-              <a:rPr lang="en-US" sz="825" dirty="0">
+            <a:endParaRPr lang="en-US" sz="825"/>
+          </a:p>
+          <a:p>
+            <a:r>
+              <a:rPr lang="en-US" sz="825">
                 <a:solidFill>
                   <a:srgbClr val="FFFFFF"/>
                 </a:solidFill>
@@ -11212,11 +11189,11 @@
               </a:rPr>
               <a:t>• 233 countries standardised</a:t>
             </a:r>
-            <a:endParaRPr lang="en-US" sz="825" dirty="0"/>
-          </a:p>
-          <a:p>
-            <a:r>
-              <a:rPr lang="en-US" sz="825" dirty="0">
+            <a:endParaRPr lang="en-US" sz="825"/>
+          </a:p>
+          <a:p>
+            <a:r>
+              <a:rPr lang="en-US" sz="825">
                 <a:solidFill>
                   <a:srgbClr val="FFFFFF"/>
                 </a:solidFill>
@@ -11226,11 +11203,11 @@
               </a:rPr>
               <a:t>• Single source of truth</a:t>
             </a:r>
-            <a:endParaRPr lang="en-US" sz="825" dirty="0"/>
-          </a:p>
-          <a:p>
-            <a:r>
-              <a:rPr lang="en-US" sz="825" dirty="0">
+            <a:endParaRPr lang="en-US" sz="825"/>
+          </a:p>
+          <a:p>
+            <a:r>
+              <a:rPr lang="en-US" sz="825">
                 <a:solidFill>
                   <a:srgbClr val="FFFFFF"/>
                 </a:solidFill>
@@ -11240,11 +11217,11 @@
               </a:rPr>
               <a:t>• Continent + WHO region</a:t>
             </a:r>
-            <a:endParaRPr lang="en-US" sz="825" dirty="0"/>
-          </a:p>
-          <a:p>
-            <a:r>
-              <a:rPr lang="en-US" sz="825" dirty="0">
+            <a:endParaRPr lang="en-US" sz="825"/>
+          </a:p>
+          <a:p>
+            <a:r>
+              <a:rPr lang="en-US" sz="825">
                 <a:solidFill>
                   <a:srgbClr val="FFFFFF"/>
                 </a:solidFill>
@@ -11254,7 +11231,7 @@
               </a:rPr>
               <a:t>• Manual fixes applied</a:t>
             </a:r>
-            <a:endParaRPr lang="en-US" sz="825" dirty="0"/>
+            <a:endParaRPr lang="en-US" sz="825"/>
           </a:p>
         </p:txBody>
       </p:sp>
@@ -11312,7 +11289,7 @@
           <a:lstStyle/>
           <a:p>
             <a:r>
-              <a:rPr lang="en-US" sz="900" b="1" dirty="0">
+              <a:rPr lang="en-US" sz="900" b="1">
                 <a:solidFill>
                   <a:srgbClr val="0D9488"/>
                 </a:solidFill>
@@ -11322,7 +11299,7 @@
               </a:rPr>
               <a:t>Country Name Fixes Applied:</a:t>
             </a:r>
-            <a:endParaRPr lang="en-US" sz="900" dirty="0"/>
+            <a:endParaRPr lang="en-US" sz="900"/>
           </a:p>
         </p:txBody>
       </p:sp>
@@ -11348,7 +11325,7 @@
           <a:lstStyle/>
           <a:p>
             <a:r>
-              <a:rPr lang="en-US" sz="825" dirty="0">
+              <a:rPr lang="en-US" sz="825">
                 <a:solidFill>
                   <a:srgbClr val="F1F5F9"/>
                 </a:solidFill>
@@ -11358,7 +11335,7 @@
               </a:rPr>
               <a:t>• Swaziland → Eswatini</a:t>
             </a:r>
-            <a:endParaRPr lang="en-US" sz="825" dirty="0"/>
+            <a:endParaRPr lang="en-US" sz="825"/>
           </a:p>
         </p:txBody>
       </p:sp>
@@ -11384,7 +11361,7 @@
           <a:lstStyle/>
           <a:p>
             <a:r>
-              <a:rPr lang="en-US" sz="825" dirty="0">
+              <a:rPr lang="en-US" sz="825">
                 <a:solidFill>
                   <a:srgbClr val="F1F5F9"/>
                 </a:solidFill>
@@ -11394,7 +11371,7 @@
               </a:rPr>
               <a:t>• Macedonia → North Macedonia</a:t>
             </a:r>
-            <a:endParaRPr lang="en-US" sz="825" dirty="0"/>
+            <a:endParaRPr lang="en-US" sz="825"/>
           </a:p>
         </p:txBody>
       </p:sp>
@@ -11420,7 +11397,7 @@
           <a:lstStyle/>
           <a:p>
             <a:r>
-              <a:rPr lang="en-US" sz="825" dirty="0">
+              <a:rPr lang="en-US" sz="825">
                 <a:solidFill>
                   <a:srgbClr val="F1F5F9"/>
                 </a:solidFill>
@@ -11430,7 +11407,7 @@
               </a:rPr>
               <a:t>• Czech Republic → Czechia</a:t>
             </a:r>
-            <a:endParaRPr lang="en-US" sz="825" dirty="0"/>
+            <a:endParaRPr lang="en-US" sz="825"/>
           </a:p>
         </p:txBody>
       </p:sp>
@@ -11456,7 +11433,7 @@
           <a:lstStyle/>
           <a:p>
             <a:r>
-              <a:rPr lang="en-US" sz="825" dirty="0">
+              <a:rPr lang="en-US" sz="825">
                 <a:solidFill>
                   <a:srgbClr val="F1F5F9"/>
                 </a:solidFill>
@@ -11466,7 +11443,7 @@
               </a:rPr>
               <a:t>• 38 regional aggregates removed</a:t>
             </a:r>
-            <a:endParaRPr lang="en-US" sz="825" dirty="0"/>
+            <a:endParaRPr lang="en-US" sz="825"/>
           </a:p>
         </p:txBody>
       </p:sp>
@@ -11557,7 +11534,7 @@
           <a:lstStyle/>
           <a:p>
             <a:r>
-              <a:rPr lang="en-US" sz="2700" b="1" dirty="0">
+              <a:rPr lang="en-US" sz="2700" b="1">
                 <a:solidFill>
                   <a:srgbClr val="0D1B2A"/>
                 </a:solidFill>
@@ -11567,7 +11544,7 @@
               </a:rPr>
               <a:t>Pipeline Results</a:t>
             </a:r>
-            <a:endParaRPr lang="en-US" sz="2700" dirty="0"/>
+            <a:endParaRPr lang="en-US" sz="2700"/>
           </a:p>
         </p:txBody>
       </p:sp>
@@ -11665,7 +11642,7 @@
           <a:p>
             <a:pPr algn="ctr"/>
             <a:r>
-              <a:rPr lang="en-US" sz="900" b="1" dirty="0">
+              <a:rPr lang="en-US" sz="900" b="1">
                 <a:solidFill>
                   <a:srgbClr val="FFFFFF"/>
                 </a:solidFill>
@@ -11675,7 +11652,7 @@
               </a:rPr>
               <a:t>BRONZE LAYER</a:t>
             </a:r>
-            <a:endParaRPr lang="en-US" sz="900" dirty="0"/>
+            <a:endParaRPr lang="en-US" sz="900"/>
           </a:p>
         </p:txBody>
       </p:sp>
@@ -11702,7 +11679,7 @@
           <a:p>
             <a:pPr algn="ctr"/>
             <a:r>
-              <a:rPr lang="en-US" sz="1650" b="1" dirty="0">
+              <a:rPr lang="en-US" sz="1650" b="1">
                 <a:solidFill>
                   <a:srgbClr val="B45309"/>
                 </a:solidFill>
@@ -11712,7 +11689,7 @@
               </a:rPr>
               <a:t>4 Tables</a:t>
             </a:r>
-            <a:endParaRPr lang="en-US" sz="1650" dirty="0"/>
+            <a:endParaRPr lang="en-US" sz="1650"/>
           </a:p>
         </p:txBody>
       </p:sp>
@@ -11738,7 +11715,7 @@
           <a:lstStyle/>
           <a:p>
             <a:r>
-              <a:rPr lang="en-US" sz="750" dirty="0">
+              <a:rPr lang="en-US" sz="750">
                 <a:solidFill>
                   <a:srgbClr val="94A3B8"/>
                 </a:solidFill>
@@ -11748,7 +11725,7 @@
               </a:rPr>
               <a:t>• bronze_urbanisation  27,573 rows</a:t>
             </a:r>
-            <a:endParaRPr lang="en-US" sz="750" dirty="0"/>
+            <a:endParaRPr lang="en-US" sz="750"/>
           </a:p>
         </p:txBody>
       </p:sp>
@@ -11774,7 +11751,7 @@
           <a:lstStyle/>
           <a:p>
             <a:r>
-              <a:rPr lang="en-US" sz="750" dirty="0">
+              <a:rPr lang="en-US" sz="750">
                 <a:solidFill>
                   <a:srgbClr val="94A3B8"/>
                 </a:solidFill>
@@ -11784,7 +11761,7 @@
               </a:rPr>
               <a:t>• bronze_wid_income  7,078 rows</a:t>
             </a:r>
-            <a:endParaRPr lang="en-US" sz="750" dirty="0"/>
+            <a:endParaRPr lang="en-US" sz="750"/>
           </a:p>
         </p:txBody>
       </p:sp>
@@ -11810,7 +11787,7 @@
           <a:lstStyle/>
           <a:p>
             <a:r>
-              <a:rPr lang="en-US" sz="750" dirty="0">
+              <a:rPr lang="en-US" sz="750">
                 <a:solidFill>
                   <a:srgbClr val="94A3B8"/>
                 </a:solidFill>
@@ -11820,7 +11797,7 @@
               </a:rPr>
               <a:t>• bronze_continents  285 rows</a:t>
             </a:r>
-            <a:endParaRPr lang="en-US" sz="750" dirty="0"/>
+            <a:endParaRPr lang="en-US" sz="750"/>
           </a:p>
         </p:txBody>
       </p:sp>
@@ -11846,7 +11823,7 @@
           <a:lstStyle/>
           <a:p>
             <a:r>
-              <a:rPr lang="en-US" sz="750" dirty="0">
+              <a:rPr lang="en-US" sz="750">
                 <a:solidFill>
                   <a:srgbClr val="94A3B8"/>
                 </a:solidFill>
@@ -11856,7 +11833,7 @@
               </a:rPr>
               <a:t>• bronze_who_regions  194 rows</a:t>
             </a:r>
-            <a:endParaRPr lang="en-US" sz="750" dirty="0"/>
+            <a:endParaRPr lang="en-US" sz="750"/>
           </a:p>
         </p:txBody>
       </p:sp>
@@ -11954,7 +11931,7 @@
           <a:p>
             <a:pPr algn="ctr"/>
             <a:r>
-              <a:rPr lang="en-US" sz="900" b="1" dirty="0">
+              <a:rPr lang="en-US" sz="900" b="1">
                 <a:solidFill>
                   <a:srgbClr val="FFFFFF"/>
                 </a:solidFill>
@@ -11964,7 +11941,7 @@
               </a:rPr>
               <a:t>SILVER LAYER</a:t>
             </a:r>
-            <a:endParaRPr lang="en-US" sz="900" dirty="0"/>
+            <a:endParaRPr lang="en-US" sz="900"/>
           </a:p>
         </p:txBody>
       </p:sp>
@@ -11991,7 +11968,7 @@
           <a:p>
             <a:pPr algn="ctr"/>
             <a:r>
-              <a:rPr lang="en-US" sz="1650" b="1" dirty="0">
+              <a:rPr lang="en-US" sz="1650" b="1">
                 <a:solidFill>
                   <a:srgbClr val="64748B"/>
                 </a:solidFill>
@@ -12001,7 +11978,7 @@
               </a:rPr>
               <a:t>1 Table</a:t>
             </a:r>
-            <a:endParaRPr lang="en-US" sz="1650" dirty="0"/>
+            <a:endParaRPr lang="en-US" sz="1650"/>
           </a:p>
         </p:txBody>
       </p:sp>
@@ -12027,7 +12004,7 @@
           <a:lstStyle/>
           <a:p>
             <a:r>
-              <a:rPr lang="en-US" sz="750" dirty="0">
+              <a:rPr lang="en-US" sz="750">
                 <a:solidFill>
                   <a:srgbClr val="94A3B8"/>
                 </a:solidFill>
@@ -12037,7 +12014,7 @@
               </a:rPr>
               <a:t>• silver_urbanisation  23,735 rows</a:t>
             </a:r>
-            <a:endParaRPr lang="en-US" sz="750" dirty="0"/>
+            <a:endParaRPr lang="en-US" sz="750"/>
           </a:p>
         </p:txBody>
       </p:sp>
@@ -12063,7 +12040,7 @@
           <a:lstStyle/>
           <a:p>
             <a:r>
-              <a:rPr lang="en-US" sz="750" dirty="0">
+              <a:rPr lang="en-US" sz="750">
                 <a:solidFill>
                   <a:srgbClr val="94A3B8"/>
                 </a:solidFill>
@@ -12073,7 +12050,7 @@
               </a:rPr>
               <a:t>• 233 countries mapped</a:t>
             </a:r>
-            <a:endParaRPr lang="en-US" sz="750" dirty="0"/>
+            <a:endParaRPr lang="en-US" sz="750"/>
           </a:p>
         </p:txBody>
       </p:sp>
@@ -12099,7 +12076,7 @@
           <a:lstStyle/>
           <a:p>
             <a:r>
-              <a:rPr lang="en-US" sz="750" dirty="0">
+              <a:rPr lang="en-US" sz="750">
                 <a:solidFill>
                   <a:srgbClr val="94A3B8"/>
                 </a:solidFill>
@@ -12109,7 +12086,7 @@
               </a:rPr>
               <a:t>• 1950 – 2050 coverage</a:t>
             </a:r>
-            <a:endParaRPr lang="en-US" sz="750" dirty="0"/>
+            <a:endParaRPr lang="en-US" sz="750"/>
           </a:p>
         </p:txBody>
       </p:sp>
@@ -12135,7 +12112,7 @@
           <a:lstStyle/>
           <a:p>
             <a:r>
-              <a:rPr lang="en-US" sz="750" dirty="0">
+              <a:rPr lang="en-US" sz="750">
                 <a:solidFill>
                   <a:srgbClr val="94A3B8"/>
                 </a:solidFill>
@@ -12145,7 +12122,7 @@
               </a:rPr>
               <a:t>• Historical + Projected</a:t>
             </a:r>
-            <a:endParaRPr lang="en-US" sz="750" dirty="0"/>
+            <a:endParaRPr lang="en-US" sz="750"/>
           </a:p>
         </p:txBody>
       </p:sp>
@@ -12243,7 +12220,7 @@
           <a:p>
             <a:pPr algn="ctr"/>
             <a:r>
-              <a:rPr lang="en-US" sz="900" b="1" dirty="0">
+              <a:rPr lang="en-US" sz="900" b="1">
                 <a:solidFill>
                   <a:srgbClr val="FFFFFF"/>
                 </a:solidFill>
@@ -12253,7 +12230,7 @@
               </a:rPr>
               <a:t>GOLD LAYER</a:t>
             </a:r>
-            <a:endParaRPr lang="en-US" sz="900" dirty="0"/>
+            <a:endParaRPr lang="en-US" sz="900"/>
           </a:p>
         </p:txBody>
       </p:sp>
@@ -12280,7 +12257,7 @@
           <a:p>
             <a:pPr algn="ctr"/>
             <a:r>
-              <a:rPr lang="en-US" sz="1650" b="1" dirty="0">
+              <a:rPr lang="en-US" sz="1650" b="1">
                 <a:solidFill>
                   <a:srgbClr val="D97706"/>
                 </a:solidFill>
@@ -12290,7 +12267,7 @@
               </a:rPr>
               <a:t>4 Tables</a:t>
             </a:r>
-            <a:endParaRPr lang="en-US" sz="1650" dirty="0"/>
+            <a:endParaRPr lang="en-US" sz="1650"/>
           </a:p>
         </p:txBody>
       </p:sp>
@@ -12316,7 +12293,7 @@
           <a:lstStyle/>
           <a:p>
             <a:r>
-              <a:rPr lang="en-US" sz="750" dirty="0">
+              <a:rPr lang="en-US" sz="750">
                 <a:solidFill>
                   <a:srgbClr val="94A3B8"/>
                 </a:solidFill>
@@ -12326,7 +12303,7 @@
               </a:rPr>
               <a:t>• gold_continent_trends  606 rows</a:t>
             </a:r>
-            <a:endParaRPr lang="en-US" sz="750" dirty="0"/>
+            <a:endParaRPr lang="en-US" sz="750"/>
           </a:p>
         </p:txBody>
       </p:sp>
@@ -12352,7 +12329,7 @@
           <a:lstStyle/>
           <a:p>
             <a:r>
-              <a:rPr lang="en-US" sz="750" dirty="0">
+              <a:rPr lang="en-US" sz="750">
                 <a:solidFill>
                   <a:srgbClr val="94A3B8"/>
                 </a:solidFill>
@@ -12362,7 +12339,7 @@
               </a:rPr>
               <a:t>• gold_growth_rates  15,824 rows</a:t>
             </a:r>
-            <a:endParaRPr lang="en-US" sz="750" dirty="0"/>
+            <a:endParaRPr lang="en-US" sz="750"/>
           </a:p>
         </p:txBody>
       </p:sp>
@@ -12388,7 +12365,7 @@
           <a:lstStyle/>
           <a:p>
             <a:r>
-              <a:rPr lang="en-US" sz="750" dirty="0">
+              <a:rPr lang="en-US" sz="750">
                 <a:solidFill>
                   <a:srgbClr val="94A3B8"/>
                 </a:solidFill>
@@ -12398,7 +12375,7 @@
               </a:rPr>
               <a:t>• gold_income_vs_urbanisation  4,158</a:t>
             </a:r>
-            <a:endParaRPr lang="en-US" sz="750" dirty="0"/>
+            <a:endParaRPr lang="en-US" sz="750"/>
           </a:p>
         </p:txBody>
       </p:sp>
@@ -12424,7 +12401,7 @@
           <a:lstStyle/>
           <a:p>
             <a:r>
-              <a:rPr lang="en-US" sz="750" dirty="0">
+              <a:rPr lang="en-US" sz="750">
                 <a:solidFill>
                   <a:srgbClr val="94A3B8"/>
                 </a:solidFill>
@@ -12434,7 +12411,7 @@
               </a:rPr>
               <a:t>• gold_market_opportunity  4,158</a:t>
             </a:r>
-            <a:endParaRPr lang="en-US" sz="750" dirty="0"/>
+            <a:endParaRPr lang="en-US" sz="750"/>
           </a:p>
         </p:txBody>
       </p:sp>
@@ -12500,7 +12477,7 @@
           <a:p>
             <a:pPr algn="ctr"/>
             <a:r>
-              <a:rPr lang="en-US" sz="825" dirty="0">
+              <a:rPr lang="en-US" sz="825">
                 <a:solidFill>
                   <a:srgbClr val="0D9488"/>
                 </a:solidFill>
@@ -12510,7 +12487,7 @@
               </a:rPr>
               <a:t>✅  Data Quality Check:  PASS  —  All validations passing  •  235 countries  •  Zero duplicates  •  64% income coverage documented</a:t>
             </a:r>
-            <a:endParaRPr lang="en-US" sz="825" dirty="0"/>
+            <a:endParaRPr lang="en-US" sz="825"/>
           </a:p>
         </p:txBody>
       </p:sp>
@@ -12601,7 +12578,7 @@
           <a:lstStyle/>
           <a:p>
             <a:r>
-              <a:rPr lang="en-US" sz="2700" b="1" dirty="0">
+              <a:rPr lang="en-US" sz="2700" b="1">
                 <a:solidFill>
                   <a:srgbClr val="FFFFFF"/>
                 </a:solidFill>
@@ -12611,7 +12588,7 @@
               </a:rPr>
               <a:t>Key Business Insights</a:t>
             </a:r>
-            <a:endParaRPr lang="en-US" sz="2700" dirty="0"/>
+            <a:endParaRPr lang="en-US" sz="2700"/>
           </a:p>
         </p:txBody>
       </p:sp>
@@ -12708,7 +12685,7 @@
           <a:lstStyle/>
           <a:p>
             <a:r>
-              <a:rPr lang="en-US" sz="2100" b="1" dirty="0">
+              <a:rPr lang="en-US" sz="2100" b="1">
                 <a:solidFill>
                   <a:srgbClr val="0D9488"/>
                 </a:solidFill>
@@ -12718,7 +12695,7 @@
               </a:rPr>
               <a:t>01</a:t>
             </a:r>
-            <a:endParaRPr lang="en-US" sz="2100" dirty="0"/>
+            <a:endParaRPr lang="en-US" sz="2100"/>
           </a:p>
         </p:txBody>
       </p:sp>
@@ -12744,7 +12721,7 @@
           <a:lstStyle/>
           <a:p>
             <a:r>
-              <a:rPr lang="en-US" sz="1050" b="1" dirty="0">
+              <a:rPr lang="en-US" sz="1050" b="1">
                 <a:solidFill>
                   <a:srgbClr val="FFFFFF"/>
                 </a:solidFill>
@@ -12754,7 +12731,7 @@
               </a:rPr>
               <a:t>32 High Opportunity Markets Identified</a:t>
             </a:r>
-            <a:endParaRPr lang="en-US" sz="1050" dirty="0"/>
+            <a:endParaRPr lang="en-US" sz="1050"/>
           </a:p>
         </p:txBody>
       </p:sp>
@@ -12780,7 +12757,7 @@
           <a:lstStyle/>
           <a:p>
             <a:r>
-              <a:rPr lang="en-US" sz="788" dirty="0">
+              <a:rPr lang="en-US" sz="788">
                 <a:solidFill>
                   <a:srgbClr val="94A3B8"/>
                 </a:solidFill>
@@ -12790,7 +12767,7 @@
               </a:rPr>
               <a:t>Our composite scoring model — combining urbanisation rate, mean income and population size — identified 32 countries that score in the top tier across all three dimensions. These are the markets the sales team should prioritise for product expansion.</a:t>
             </a:r>
-            <a:endParaRPr lang="en-US" sz="788" dirty="0"/>
+            <a:endParaRPr lang="en-US" sz="788"/>
           </a:p>
         </p:txBody>
       </p:sp>
@@ -12887,7 +12864,7 @@
           <a:lstStyle/>
           <a:p>
             <a:r>
-              <a:rPr lang="en-US" sz="2100" b="1" dirty="0">
+              <a:rPr lang="en-US" sz="2100" b="1">
                 <a:solidFill>
                   <a:srgbClr val="F59E0B"/>
                 </a:solidFill>
@@ -12897,7 +12874,7 @@
               </a:rPr>
               <a:t>02</a:t>
             </a:r>
-            <a:endParaRPr lang="en-US" sz="2100" dirty="0"/>
+            <a:endParaRPr lang="en-US" sz="2100"/>
           </a:p>
         </p:txBody>
       </p:sp>
@@ -12923,7 +12900,7 @@
           <a:lstStyle/>
           <a:p>
             <a:r>
-              <a:rPr lang="en-US" sz="1050" b="1" dirty="0">
+              <a:rPr lang="en-US" sz="1050" b="1">
                 <a:solidFill>
                   <a:srgbClr val="FFFFFF"/>
                 </a:solidFill>
@@ -12933,7 +12910,7 @@
               </a:rPr>
               <a:t>Africa is Urbanising Faster Than Any Other Region</a:t>
             </a:r>
-            <a:endParaRPr lang="en-US" sz="1050" dirty="0"/>
+            <a:endParaRPr lang="en-US" sz="1050"/>
           </a:p>
         </p:txBody>
       </p:sp>
@@ -12959,7 +12936,7 @@
           <a:lstStyle/>
           <a:p>
             <a:r>
-              <a:rPr lang="en-US" sz="788" dirty="0">
+              <a:rPr lang="en-US" sz="788">
                 <a:solidFill>
                   <a:srgbClr val="94A3B8"/>
                 </a:solidFill>
@@ -12969,7 +12946,7 @@
               </a:rPr>
               <a:t>Sub-Saharan Africa is projected to double its urban population by 2050. Combined with a young demographic and rising incomes in key markets, this represents the most significant long-term growth opportunity — though high income inequality in many markets remains a risk factor.</a:t>
             </a:r>
-            <a:endParaRPr lang="en-US" sz="788" dirty="0"/>
+            <a:endParaRPr lang="en-US" sz="788"/>
           </a:p>
         </p:txBody>
       </p:sp>
@@ -13066,7 +13043,7 @@
           <a:lstStyle/>
           <a:p>
             <a:r>
-              <a:rPr lang="en-US" sz="2100" b="1" dirty="0">
+              <a:rPr lang="en-US" sz="2100" b="1">
                 <a:solidFill>
                   <a:srgbClr val="14B8A6"/>
                 </a:solidFill>
@@ -13076,7 +13053,7 @@
               </a:rPr>
               <a:t>03</a:t>
             </a:r>
-            <a:endParaRPr lang="en-US" sz="2100" dirty="0"/>
+            <a:endParaRPr lang="en-US" sz="2100"/>
           </a:p>
         </p:txBody>
       </p:sp>
@@ -13102,7 +13079,7 @@
           <a:lstStyle/>
           <a:p>
             <a:r>
-              <a:rPr lang="en-US" sz="1050" b="1" dirty="0">
+              <a:rPr lang="en-US" sz="1050" b="1">
                 <a:solidFill>
                   <a:srgbClr val="FFFFFF"/>
                 </a:solidFill>
@@ -13112,7 +13089,7 @@
               </a:rPr>
               <a:t>The Urbanisation Inflection Point</a:t>
             </a:r>
-            <a:endParaRPr lang="en-US" sz="1050" dirty="0"/>
+            <a:endParaRPr lang="en-US" sz="1050"/>
           </a:p>
         </p:txBody>
       </p:sp>
@@ -13138,7 +13115,7 @@
           <a:lstStyle/>
           <a:p>
             <a:r>
-              <a:rPr lang="en-US" sz="788" dirty="0">
+              <a:rPr lang="en-US" sz="788">
                 <a:solidFill>
                   <a:srgbClr val="94A3B8"/>
                 </a:solidFill>
@@ -13148,7 +13125,7 @@
               </a:rPr>
               <a:t>Countries crossing the 50–60% urbanisation threshold show accelerating income growth. Countries currently approaching this threshold — particularly in Southeast Asia and East Africa — represent the highest near-term growth opportunity.</a:t>
             </a:r>
-            <a:endParaRPr lang="en-US" sz="788" dirty="0"/>
+            <a:endParaRPr lang="en-US" sz="788"/>
           </a:p>
         </p:txBody>
       </p:sp>
@@ -13239,7 +13216,7 @@
           <a:lstStyle/>
           <a:p>
             <a:r>
-              <a:rPr lang="en-US" sz="2700" b="1" dirty="0">
+              <a:rPr lang="en-US" sz="2700" b="1">
                 <a:solidFill>
                   <a:srgbClr val="0D1B2A"/>
                 </a:solidFill>
@@ -13249,7 +13226,7 @@
               </a:rPr>
               <a:t>What I Would Do Next</a:t>
             </a:r>
-            <a:endParaRPr lang="en-US" sz="2700" dirty="0"/>
+            <a:endParaRPr lang="en-US" sz="2700"/>
           </a:p>
         </p:txBody>
       </p:sp>
@@ -13350,7 +13327,7 @@
           <a:lstStyle/>
           <a:p>
             <a:r>
-              <a:rPr lang="en-US" sz="600" b="1" dirty="0">
+              <a:rPr lang="en-US" sz="600" b="1">
                 <a:solidFill>
                   <a:srgbClr val="0D9488"/>
                 </a:solidFill>
@@ -13360,7 +13337,7 @@
               </a:rPr>
               <a:t>Performance</a:t>
             </a:r>
-            <a:endParaRPr lang="en-US" sz="600" dirty="0"/>
+            <a:endParaRPr lang="en-US" sz="600"/>
           </a:p>
         </p:txBody>
       </p:sp>
@@ -13387,14 +13364,14 @@
           <a:p>
             <a:pPr algn="ctr"/>
             <a:r>
-              <a:rPr lang="en-US" sz="1650" dirty="0">
+              <a:rPr lang="en-US" sz="1650">
                 <a:solidFill>
                   <a:srgbClr val="000000"/>
                 </a:solidFill>
               </a:rPr>
               <a:t>⚡</a:t>
             </a:r>
-            <a:endParaRPr lang="en-US" sz="1650" dirty="0"/>
+            <a:endParaRPr lang="en-US" sz="1650"/>
           </a:p>
         </p:txBody>
       </p:sp>
@@ -13420,7 +13397,7 @@
           <a:lstStyle/>
           <a:p>
             <a:r>
-              <a:rPr lang="en-US" sz="825" b="1" dirty="0">
+              <a:rPr lang="en-US" sz="825" b="1">
                 <a:solidFill>
                   <a:srgbClr val="0D1B2A"/>
                 </a:solidFill>
@@ -13430,7 +13407,7 @@
               </a:rPr>
               <a:t>Incremental Data Loads</a:t>
             </a:r>
-            <a:endParaRPr lang="en-US" sz="825" dirty="0"/>
+            <a:endParaRPr lang="en-US" sz="825"/>
           </a:p>
         </p:txBody>
       </p:sp>
@@ -13456,7 +13433,7 @@
           <a:lstStyle/>
           <a:p>
             <a:r>
-              <a:rPr lang="en-US" sz="675" dirty="0">
+              <a:rPr lang="en-US" sz="675">
                 <a:solidFill>
                   <a:srgbClr val="94A3B8"/>
                 </a:solidFill>
@@ -13466,7 +13443,7 @@
               </a:rPr>
               <a:t>Replace full refresh with watermark-based incremental loading using Delta Lake MERGE. Only process new or changed records each run.</a:t>
             </a:r>
-            <a:endParaRPr lang="en-US" sz="675" dirty="0"/>
+            <a:endParaRPr lang="en-US" sz="675"/>
           </a:p>
         </p:txBody>
       </p:sp>
@@ -13567,7 +13544,7 @@
           <a:lstStyle/>
           <a:p>
             <a:r>
-              <a:rPr lang="en-US" sz="600" b="1" dirty="0">
+              <a:rPr lang="en-US" sz="600" b="1">
                 <a:solidFill>
                   <a:srgbClr val="0D9488"/>
                 </a:solidFill>
@@ -13577,7 +13554,7 @@
               </a:rPr>
               <a:t>Reliability</a:t>
             </a:r>
-            <a:endParaRPr lang="en-US" sz="600" dirty="0"/>
+            <a:endParaRPr lang="en-US" sz="600"/>
           </a:p>
         </p:txBody>
       </p:sp>
@@ -13604,14 +13581,14 @@
           <a:p>
             <a:pPr algn="ctr"/>
             <a:r>
-              <a:rPr lang="en-US" sz="1650" dirty="0">
+              <a:rPr lang="en-US" sz="1650">
                 <a:solidFill>
                   <a:srgbClr val="000000"/>
                 </a:solidFill>
               </a:rPr>
               <a:t>🔄</a:t>
             </a:r>
-            <a:endParaRPr lang="en-US" sz="1650" dirty="0"/>
+            <a:endParaRPr lang="en-US" sz="1650"/>
           </a:p>
         </p:txBody>
       </p:sp>
@@ -13637,7 +13614,7 @@
           <a:lstStyle/>
           <a:p>
             <a:r>
-              <a:rPr lang="en-US" sz="825" b="1" dirty="0">
+              <a:rPr lang="en-US" sz="825" b="1">
                 <a:solidFill>
                   <a:srgbClr val="0D1B2A"/>
                 </a:solidFill>
@@ -13647,7 +13624,7 @@
               </a:rPr>
               <a:t>Automated Orchestration</a:t>
             </a:r>
-            <a:endParaRPr lang="en-US" sz="825" dirty="0"/>
+            <a:endParaRPr lang="en-US" sz="825"/>
           </a:p>
         </p:txBody>
       </p:sp>
@@ -13673,7 +13650,7 @@
           <a:lstStyle/>
           <a:p>
             <a:r>
-              <a:rPr lang="en-US" sz="675" dirty="0">
+              <a:rPr lang="en-US" sz="675">
                 <a:solidFill>
                   <a:srgbClr val="94A3B8"/>
                 </a:solidFill>
@@ -13683,7 +13660,7 @@
               </a:rPr>
               <a:t>Schedule notebooks via Fabric Data Factory with dependencies — Bronze → Silver → Gold → DQ check. Pipeline stops and alerts on failure.</a:t>
             </a:r>
-            <a:endParaRPr lang="en-US" sz="675" dirty="0"/>
+            <a:endParaRPr lang="en-US" sz="675"/>
           </a:p>
         </p:txBody>
       </p:sp>
@@ -13784,7 +13761,7 @@
           <a:lstStyle/>
           <a:p>
             <a:r>
-              <a:rPr lang="en-US" sz="600" b="1" dirty="0">
+              <a:rPr lang="en-US" sz="600" b="1">
                 <a:solidFill>
                   <a:srgbClr val="0D9488"/>
                 </a:solidFill>
@@ -13794,7 +13771,7 @@
               </a:rPr>
               <a:t>Quality</a:t>
             </a:r>
-            <a:endParaRPr lang="en-US" sz="600" dirty="0"/>
+            <a:endParaRPr lang="en-US" sz="600"/>
           </a:p>
         </p:txBody>
       </p:sp>
@@ -13821,14 +13798,14 @@
           <a:p>
             <a:pPr algn="ctr"/>
             <a:r>
-              <a:rPr lang="en-US" sz="1650" dirty="0">
+              <a:rPr lang="en-US" sz="1650">
                 <a:solidFill>
                   <a:srgbClr val="000000"/>
                 </a:solidFill>
               </a:rPr>
               <a:t>🛡️</a:t>
             </a:r>
-            <a:endParaRPr lang="en-US" sz="1650" dirty="0"/>
+            <a:endParaRPr lang="en-US" sz="1650"/>
           </a:p>
         </p:txBody>
       </p:sp>
@@ -13854,7 +13831,7 @@
           <a:lstStyle/>
           <a:p>
             <a:r>
-              <a:rPr lang="en-US" sz="825" b="1" dirty="0">
+              <a:rPr lang="en-US" sz="825" b="1">
                 <a:solidFill>
                   <a:srgbClr val="0D1B2A"/>
                 </a:solidFill>
@@ -13864,7 +13841,7 @@
               </a:rPr>
               <a:t>Formal Data Quality Contracts</a:t>
             </a:r>
-            <a:endParaRPr lang="en-US" sz="825" dirty="0"/>
+            <a:endParaRPr lang="en-US" sz="825"/>
           </a:p>
         </p:txBody>
       </p:sp>
@@ -13890,7 +13867,7 @@
           <a:lstStyle/>
           <a:p>
             <a:r>
-              <a:rPr lang="en-US" sz="675" dirty="0">
+              <a:rPr lang="en-US" sz="675">
                 <a:solidFill>
                   <a:srgbClr val="94A3B8"/>
                 </a:solidFill>
@@ -13900,7 +13877,7 @@
               </a:rPr>
               <a:t>Replace informational DQ checks with hard stops using Great Expectations or dbt tests. Define expected row counts, value ranges and referential integrity.</a:t>
             </a:r>
-            <a:endParaRPr lang="en-US" sz="675" dirty="0"/>
+            <a:endParaRPr lang="en-US" sz="675"/>
           </a:p>
         </p:txBody>
       </p:sp>
@@ -14001,7 +13978,7 @@
           <a:lstStyle/>
           <a:p>
             <a:r>
-              <a:rPr lang="en-US" sz="600" b="1" dirty="0">
+              <a:rPr lang="en-US" sz="600" b="1">
                 <a:solidFill>
                   <a:srgbClr val="0D9488"/>
                 </a:solidFill>
@@ -14011,7 +13988,7 @@
               </a:rPr>
               <a:t>Maintainability</a:t>
             </a:r>
-            <a:endParaRPr lang="en-US" sz="600" dirty="0"/>
+            <a:endParaRPr lang="en-US" sz="600"/>
           </a:p>
         </p:txBody>
       </p:sp>
@@ -14038,14 +14015,14 @@
           <a:p>
             <a:pPr algn="ctr"/>
             <a:r>
-              <a:rPr lang="en-US" sz="1650" dirty="0">
+              <a:rPr lang="en-US" sz="1650">
                 <a:solidFill>
                   <a:srgbClr val="000000"/>
                 </a:solidFill>
               </a:rPr>
               <a:t>🔀</a:t>
             </a:r>
-            <a:endParaRPr lang="en-US" sz="1650" dirty="0"/>
+            <a:endParaRPr lang="en-US" sz="1650"/>
           </a:p>
         </p:txBody>
       </p:sp>
@@ -14071,7 +14048,7 @@
           <a:lstStyle/>
           <a:p>
             <a:r>
-              <a:rPr lang="en-US" sz="825" b="1" dirty="0">
+              <a:rPr lang="en-US" sz="825" b="1">
                 <a:solidFill>
                   <a:srgbClr val="0D1B2A"/>
                 </a:solidFill>
@@ -14081,7 +14058,7 @@
               </a:rPr>
               <a:t>CI/CD via GitHub Actions</a:t>
             </a:r>
-            <a:endParaRPr lang="en-US" sz="825" dirty="0"/>
+            <a:endParaRPr lang="en-US" sz="825"/>
           </a:p>
         </p:txBody>
       </p:sp>
@@ -14107,7 +14084,7 @@
           <a:lstStyle/>
           <a:p>
             <a:r>
-              <a:rPr lang="en-US" sz="675" dirty="0">
+              <a:rPr lang="en-US" sz="675">
                 <a:solidFill>
                   <a:srgbClr val="94A3B8"/>
                 </a:solidFill>
@@ -14117,7 +14094,7 @@
               </a:rPr>
               <a:t>Automated testing and deployment of notebook changes through pull requests before reaching production.</a:t>
             </a:r>
-            <a:endParaRPr lang="en-US" sz="675" dirty="0"/>
+            <a:endParaRPr lang="en-US" sz="675"/>
           </a:p>
         </p:txBody>
       </p:sp>
@@ -14218,7 +14195,7 @@
           <a:lstStyle/>
           <a:p>
             <a:r>
-              <a:rPr lang="en-US" sz="600" b="1" dirty="0">
+              <a:rPr lang="en-US" sz="600" b="1">
                 <a:solidFill>
                   <a:srgbClr val="0D9488"/>
                 </a:solidFill>
@@ -14228,7 +14205,7 @@
               </a:rPr>
               <a:t>Enrichment</a:t>
             </a:r>
-            <a:endParaRPr lang="en-US" sz="600" dirty="0"/>
+            <a:endParaRPr lang="en-US" sz="600"/>
           </a:p>
         </p:txBody>
       </p:sp>
@@ -14255,14 +14232,14 @@
           <a:p>
             <a:pPr algn="ctr"/>
             <a:r>
-              <a:rPr lang="en-US" sz="1650" dirty="0">
+              <a:rPr lang="en-US" sz="1650">
                 <a:solidFill>
                   <a:srgbClr val="000000"/>
                 </a:solidFill>
               </a:rPr>
               <a:t>📈</a:t>
             </a:r>
-            <a:endParaRPr lang="en-US" sz="1650" dirty="0"/>
+            <a:endParaRPr lang="en-US" sz="1650"/>
           </a:p>
         </p:txBody>
       </p:sp>
@@ -14288,7 +14265,7 @@
           <a:lstStyle/>
           <a:p>
             <a:r>
-              <a:rPr lang="en-US" sz="825" b="1" dirty="0">
+              <a:rPr lang="en-US" sz="825" b="1">
                 <a:solidFill>
                   <a:srgbClr val="0D1B2A"/>
                 </a:solidFill>
@@ -14298,7 +14275,7 @@
               </a:rPr>
               <a:t>Additional Data Sources</a:t>
             </a:r>
-            <a:endParaRPr lang="en-US" sz="825" dirty="0"/>
+            <a:endParaRPr lang="en-US" sz="825"/>
           </a:p>
         </p:txBody>
       </p:sp>
@@ -14324,7 +14301,7 @@
           <a:lstStyle/>
           <a:p>
             <a:r>
-              <a:rPr lang="en-US" sz="675" dirty="0">
+              <a:rPr lang="en-US" sz="675">
                 <a:solidFill>
                   <a:srgbClr val="94A3B8"/>
                 </a:solidFill>
@@ -14334,7 +14311,7 @@
               </a:rPr>
               <a:t>World Bank GDP data for fuller income coverage. IMF financial inclusion data showing % of population with bank accounts.</a:t>
             </a:r>
-            <a:endParaRPr lang="en-US" sz="675" dirty="0"/>
+            <a:endParaRPr lang="en-US" sz="675"/>
           </a:p>
         </p:txBody>
       </p:sp>
@@ -14435,7 +14412,7 @@
           <a:lstStyle/>
           <a:p>
             <a:r>
-              <a:rPr lang="en-US" sz="600" b="1" dirty="0">
+              <a:rPr lang="en-US" sz="600" b="1">
                 <a:solidFill>
                   <a:srgbClr val="0D9488"/>
                 </a:solidFill>
@@ -14445,7 +14422,7 @@
               </a:rPr>
               <a:t>Usability</a:t>
             </a:r>
-            <a:endParaRPr lang="en-US" sz="600" dirty="0"/>
+            <a:endParaRPr lang="en-US" sz="600"/>
           </a:p>
         </p:txBody>
       </p:sp>
@@ -14472,14 +14449,14 @@
           <a:p>
             <a:pPr algn="ctr"/>
             <a:r>
-              <a:rPr lang="en-US" sz="1650" dirty="0">
+              <a:rPr lang="en-US" sz="1650">
                 <a:solidFill>
                   <a:srgbClr val="000000"/>
                 </a:solidFill>
               </a:rPr>
               <a:t>⚙️</a:t>
             </a:r>
-            <a:endParaRPr lang="en-US" sz="1650" dirty="0"/>
+            <a:endParaRPr lang="en-US" sz="1650"/>
           </a:p>
         </p:txBody>
       </p:sp>
@@ -14505,7 +14482,7 @@
           <a:lstStyle/>
           <a:p>
             <a:r>
-              <a:rPr lang="en-US" sz="825" b="1" dirty="0">
+              <a:rPr lang="en-US" sz="825" b="1">
                 <a:solidFill>
                   <a:srgbClr val="0D1B2A"/>
                 </a:solidFill>
@@ -14515,7 +14492,7 @@
               </a:rPr>
               <a:t>Configurable Opportunity Score</a:t>
             </a:r>
-            <a:endParaRPr lang="en-US" sz="825" dirty="0"/>
+            <a:endParaRPr lang="en-US" sz="825"/>
           </a:p>
         </p:txBody>
       </p:sp>
@@ -14541,7 +14518,7 @@
           <a:lstStyle/>
           <a:p>
             <a:r>
-              <a:rPr lang="en-US" sz="675" dirty="0">
+              <a:rPr lang="en-US" sz="675">
                 <a:solidFill>
                   <a:srgbClr val="94A3B8"/>
                 </a:solidFill>
@@ -14551,7 +14528,7 @@
               </a:rPr>
               <a:t>Move scoring weights to a config table so the investment team can run scenario analysis without touching code.</a:t>
             </a:r>
-            <a:endParaRPr lang="en-US" sz="675" dirty="0"/>
+            <a:endParaRPr lang="en-US" sz="675"/>
           </a:p>
         </p:txBody>
       </p:sp>

--- a/docs/urbanisation_prospects_presentation.pptx
+++ b/docs/urbanisation_prospects_presentation.pptx
@@ -131,7 +131,7 @@
 <p1510:revInfo xmlns:a="http://schemas.openxmlformats.org/drawingml/2006/main" xmlns:r="http://schemas.openxmlformats.org/officeDocument/2006/relationships" xmlns:p1510="http://schemas.microsoft.com/office/powerpoint/2015/10/main">
   <p1510:revLst>
     <p1510:client id="{16771182-0255-46FD-A267-F79F9FC18F6F}" v="4" dt="2026-03-01T09:09:49.479"/>
-    <p1510:client id="{7680F8FA-E828-82D0-F2DB-7DE3CC2A828A}" v="7" dt="2026-03-02T18:51:07.076"/>
+    <p1510:client id="{7680F8FA-E828-82D0-F2DB-7DE3CC2A828A}" v="10" dt="2026-03-03T04:59:00.412"/>
   </p1510:revLst>
 </p1510:revInfo>
 </file>
@@ -915,14 +915,6 @@
           <ac:spMkLst>
             <pc:docMk/>
             <pc:sldMk cId="663972408" sldId="265"/>
-            <ac:spMk id="3" creationId="{DCDE7B3F-3142-7DBE-036A-95A50D72349B}"/>
-          </ac:spMkLst>
-        </pc:spChg>
-        <pc:spChg chg="mod">
-          <ac:chgData name="Jonathan Hayward" userId="b50b5895-66ae-4161-9610-d0d8f25118a4" providerId="ADAL" clId="{72FF0399-27F1-49DB-9E36-447A45B81DB4}" dt="2026-02-28T16:17:51.210" v="2"/>
-          <ac:spMkLst>
-            <pc:docMk/>
-            <pc:sldMk cId="663972408" sldId="265"/>
             <ac:spMk id="5" creationId="{B043618C-CAAF-A616-C8B6-744944726FA2}"/>
           </ac:spMkLst>
         </pc:spChg>
@@ -948,10 +940,25 @@
   <pc:docChgLst>
     <pc:chgData name="Jonathan Hayward" userId="S::jonathan.hayward@ninetyone.com::b50b5895-66ae-4161-9610-d0d8f25118a4" providerId="AD" clId="Web-{7680F8FA-E828-82D0-F2DB-7DE3CC2A828A}"/>
     <pc:docChg chg="modSld">
-      <pc:chgData name="Jonathan Hayward" userId="S::jonathan.hayward@ninetyone.com::b50b5895-66ae-4161-9610-d0d8f25118a4" providerId="AD" clId="Web-{7680F8FA-E828-82D0-F2DB-7DE3CC2A828A}" dt="2026-03-02T18:51:07.076" v="5" actId="1076"/>
+      <pc:chgData name="Jonathan Hayward" userId="S::jonathan.hayward@ninetyone.com::b50b5895-66ae-4161-9610-d0d8f25118a4" providerId="AD" clId="Web-{7680F8FA-E828-82D0-F2DB-7DE3CC2A828A}" dt="2026-03-03T04:59:00.412" v="8" actId="20577"/>
       <pc:docMkLst>
         <pc:docMk/>
       </pc:docMkLst>
+      <pc:sldChg chg="modSp">
+        <pc:chgData name="Jonathan Hayward" userId="S::jonathan.hayward@ninetyone.com::b50b5895-66ae-4161-9610-d0d8f25118a4" providerId="AD" clId="Web-{7680F8FA-E828-82D0-F2DB-7DE3CC2A828A}" dt="2026-03-03T04:59:00.412" v="8" actId="20577"/>
+        <pc:sldMkLst>
+          <pc:docMk/>
+          <pc:sldMk cId="0" sldId="263"/>
+        </pc:sldMkLst>
+        <pc:spChg chg="mod">
+          <ac:chgData name="Jonathan Hayward" userId="S::jonathan.hayward@ninetyone.com::b50b5895-66ae-4161-9610-d0d8f25118a4" providerId="AD" clId="Web-{7680F8FA-E828-82D0-F2DB-7DE3CC2A828A}" dt="2026-03-03T04:59:00.412" v="8" actId="20577"/>
+          <ac:spMkLst>
+            <pc:docMk/>
+            <pc:sldMk cId="0" sldId="263"/>
+            <ac:spMk id="21" creationId="{00000000-0000-0000-0000-000000000000}"/>
+          </ac:spMkLst>
+        </pc:spChg>
+      </pc:sldChg>
       <pc:sldChg chg="addSp delSp modSp">
         <pc:chgData name="Jonathan Hayward" userId="S::jonathan.hayward@ninetyone.com::b50b5895-66ae-4161-9610-d0d8f25118a4" providerId="AD" clId="Web-{7680F8FA-E828-82D0-F2DB-7DE3CC2A828A}" dt="2026-03-02T18:51:07.076" v="5" actId="1076"/>
         <pc:sldMkLst>
@@ -13867,17 +13874,21 @@
           <a:lstStyle/>
           <a:p>
             <a:r>
-              <a:rPr lang="en-US" sz="675">
+              <a:rPr lang="en-US" sz="650" dirty="0">
                 <a:solidFill>
                   <a:srgbClr val="94A3B8"/>
                 </a:solidFill>
-                <a:latin typeface="Calibri" pitchFamily="34" charset="0"/>
-                <a:ea typeface="Calibri" pitchFamily="34" charset="-122"/>
-                <a:cs typeface="Calibri" pitchFamily="34" charset="-120"/>
+                <a:latin typeface="Calibri"/>
+                <a:ea typeface="Calibri"/>
+                <a:cs typeface="Calibri"/>
               </a:rPr>
-              <a:t>Replace informational DQ checks with hard stops using Great Expectations or dbt tests. Define expected row counts, value ranges and referential integrity.</a:t>
-            </a:r>
-            <a:endParaRPr lang="en-US" sz="675"/>
+              <a:t>Replace informational DQ checks with hard tops  Define expected row counts, value ranges and referential integrity.</a:t>
+            </a:r>
+            <a:endParaRPr lang="en-US" sz="650" dirty="0">
+              <a:latin typeface="Calibri"/>
+              <a:ea typeface="Calibri"/>
+              <a:cs typeface="Calibri"/>
+            </a:endParaRPr>
           </a:p>
         </p:txBody>
       </p:sp>
